--- a/trial_protocol_slides.pptx
+++ b/trial_protocol_slides.pptx
@@ -16,6 +16,7 @@
     <p:sldId id="264" r:id="rId15"/>
     <p:sldId id="265" r:id="rId16"/>
     <p:sldId id="266" r:id="rId17"/>
+    <p:sldId id="267" r:id="rId18"/>
   </p:sldIdLst>
   <p:sldSz cx="12188952" cy="6858000" type="screen4x3"/>
   <p:notesSz cx="6858000" cy="9144000"/>
@@ -3327,7 +3328,7 @@
                 </a:solidFill>
                 <a:latin typeface="Calibri"/>
               </a:rPr>
-              <a:t>Protocol:  Randomised clinical trial comparing drug-coated balloon to plain balloon for all peripheral AVF stenosis</a:t>
+              <a:t>Protocol:  A Randomized, Double -blind, Single Dose, 2 -way Crossover Study to Assess Bronchospasm Potentially Induced by the Hydrofluoroolefin (HFO) Metered Dose Inhaler (MDI) Propellant as Compared with the Hydrofluoroalkane (HFA) MDI Propellant in Participants with Asthma, Well Controlled or Partially Controlled on Short -acting beta 2-agonists (SABA) with or without Low -Dose Inhaled Corticosteroids (ICS)</a:t>
             </a:r>
           </a:p>
         </p:txBody>
@@ -3362,7 +3363,7 @@
                 </a:solidFill>
                 <a:latin typeface="Calibri"/>
               </a:rPr>
-              <a:t>Condition: Peripheral AVF stenosis</a:t>
+              <a:t>Condition: Asthma</a:t>
             </a:r>
           </a:p>
         </p:txBody>
@@ -3397,7 +3398,7 @@
                 </a:solidFill>
                 <a:latin typeface="Calibri"/>
               </a:rPr>
-              <a:t>Sponsor:   Boston Scientific</a:t>
+              <a:t>Sponsor:   AstraZeneca AB</a:t>
             </a:r>
           </a:p>
         </p:txBody>
@@ -3432,7 +3433,7 @@
                 </a:solidFill>
                 <a:latin typeface="Calibri"/>
               </a:rPr>
-              <a:t>Phase:     Phase 3  |  Study type: Interventional</a:t>
+              <a:t>Phase:     Phase 3b  |  Study type: Interventional</a:t>
             </a:r>
           </a:p>
         </p:txBody>
@@ -3467,7 +3468,7 @@
                 </a:solidFill>
                 <a:latin typeface="Calibri"/>
               </a:rPr>
-              <a:t>Generated: 2026-03-19T08:04:53.357367Z UTC</a:t>
+              <a:t>Generated: 2026-03-19T18:05:11.302573Z UTC</a:t>
             </a:r>
           </a:p>
         </p:txBody>
@@ -3572,7 +3573,7 @@
                 </a:solidFill>
                 <a:latin typeface="Calibri"/>
               </a:rPr>
-              <a:t>1 / 11</a:t>
+              <a:t>1 / 12</a:t>
             </a:r>
           </a:p>
         </p:txBody>
@@ -3708,79 +3709,9 @@
           </a:p>
         </p:txBody>
       </p:sp>
-      <p:sp>
-        <p:nvSpPr>
-          <p:cNvPr id="5" name="TextBox 4"/>
-          <p:cNvSpPr txBox="1"/>
-          <p:nvPr/>
-        </p:nvSpPr>
-        <p:spPr>
-          <a:xfrm>
-            <a:off x="182880" y="6583680"/>
-            <a:ext cx="8229600" cy="228600"/>
-          </a:xfrm>
-          <a:prstGeom prst="rect">
-            <a:avLst/>
-          </a:prstGeom>
-          <a:noFill/>
-        </p:spPr>
-        <p:txBody>
-          <a:bodyPr wrap="square">
-            <a:spAutoFit/>
-          </a:bodyPr>
-          <a:lstStyle/>
-          <a:p>
-            <a:pPr algn="l"/>
-            <a:r>
-              <a:rPr sz="700" b="0">
-                <a:solidFill>
-                  <a:srgbClr val="5F6B7A"/>
-                </a:solidFill>
-                <a:latin typeface="Calibri"/>
-              </a:rPr>
-              <a:t>Trial Design Explorer | Clinical Trial Planning Intelligence | Confidential draft</a:t>
-            </a:r>
-          </a:p>
-        </p:txBody>
-      </p:sp>
-      <p:sp>
-        <p:nvSpPr>
-          <p:cNvPr id="6" name="TextBox 5"/>
-          <p:cNvSpPr txBox="1"/>
-          <p:nvPr/>
-        </p:nvSpPr>
-        <p:spPr>
-          <a:xfrm>
-            <a:off x="11247120" y="6583680"/>
-            <a:ext cx="914400" cy="228600"/>
-          </a:xfrm>
-          <a:prstGeom prst="rect">
-            <a:avLst/>
-          </a:prstGeom>
-          <a:noFill/>
-        </p:spPr>
-        <p:txBody>
-          <a:bodyPr wrap="square">
-            <a:spAutoFit/>
-          </a:bodyPr>
-          <a:lstStyle/>
-          <a:p>
-            <a:pPr algn="r"/>
-            <a:r>
-              <a:rPr sz="700" b="0">
-                <a:solidFill>
-                  <a:srgbClr val="5F6B7A"/>
-                </a:solidFill>
-                <a:latin typeface="Calibri"/>
-              </a:rPr>
-              <a:t>10 / 11</a:t>
-            </a:r>
-          </a:p>
-        </p:txBody>
-      </p:sp>
       <p:graphicFrame>
         <p:nvGraphicFramePr>
-          <p:cNvPr id="7" name="Table 6"/>
+          <p:cNvPr id="5" name="Table 4"/>
           <p:cNvGraphicFramePr>
             <a:graphicFrameLocks noGrp="1"/>
           </p:cNvGraphicFramePr>
@@ -3803,7 +3734,7 @@
                 <a:gridCol w="2340864"/>
                 <a:gridCol w="2340864"/>
               </a:tblGrid>
-              <a:tr h="1767840">
+              <a:tr h="589280">
                 <a:tc>
                   <a:txBody>
                     <a:bodyPr/>
@@ -3920,7 +3851,7 @@
                   </a:tcPr>
                 </a:tc>
               </a:tr>
-              <a:tr h="1767840">
+              <a:tr h="589280">
                 <a:tc>
                   <a:txBody>
                     <a:bodyPr/>
@@ -3934,7 +3865,7 @@
                           </a:solidFill>
                           <a:latin typeface="Calibri"/>
                         </a:rPr>
-                        <a:t>36758984</a:t>
+                        <a:t>39465893</a:t>
                       </a:r>
                     </a:p>
                   </a:txBody>
@@ -3957,7 +3888,7 @@
                           </a:solidFill>
                           <a:latin typeface="Calibri"/>
                         </a:rPr>
-                        <a:t>Lindhard K et al.</a:t>
+                        <a:t>Rayner DG et al.</a:t>
                       </a:r>
                     </a:p>
                   </a:txBody>
@@ -3980,12 +3911,200 @@
                           </a:solidFill>
                           <a:latin typeface="Calibri"/>
                         </a:rPr>
+                        <a:t>2025</a:t>
+                      </a:r>
+                    </a:p>
+                  </a:txBody>
+                  <a:tcPr>
+                    <a:solidFill>
+                      <a:srgbClr val="FFFFFF"/>
+                    </a:solidFill>
+                  </a:tcPr>
+                </a:tc>
+                <a:tc>
+                  <a:txBody>
+                    <a:bodyPr/>
+                    <a:lstStyle/>
+                    <a:p>
+                      <a:pPr algn="l"/>
+                      <a:r>
+                        <a:rPr sz="800">
+                          <a:solidFill>
+                            <a:srgbClr val="15324A"/>
+                          </a:solidFill>
+                          <a:latin typeface="Calibri"/>
+                        </a:rPr>
+                        <a:t>JAMA</a:t>
+                      </a:r>
+                    </a:p>
+                  </a:txBody>
+                  <a:tcPr>
+                    <a:solidFill>
+                      <a:srgbClr val="FFFFFF"/>
+                    </a:solidFill>
+                  </a:tcPr>
+                </a:tc>
+                <a:tc>
+                  <a:txBody>
+                    <a:bodyPr/>
+                    <a:lstStyle/>
+                    <a:p>
+                      <a:pPr algn="l"/>
+                      <a:r>
+                        <a:rPr sz="800">
+                          <a:solidFill>
+                            <a:srgbClr val="15324A"/>
+                          </a:solidFill>
+                          <a:latin typeface="Calibri"/>
+                        </a:rPr>
+                        <a:t>Inhaled Reliever Therapies for Asthma: A Systematic Review and Meta-An</a:t>
+                      </a:r>
+                    </a:p>
+                  </a:txBody>
+                  <a:tcPr>
+                    <a:solidFill>
+                      <a:srgbClr val="FFFFFF"/>
+                    </a:solidFill>
+                  </a:tcPr>
+                </a:tc>
+              </a:tr>
+              <a:tr h="589280">
+                <a:tc>
+                  <a:txBody>
+                    <a:bodyPr/>
+                    <a:lstStyle/>
+                    <a:p>
+                      <a:pPr algn="l"/>
+                      <a:r>
+                        <a:rPr sz="800">
+                          <a:solidFill>
+                            <a:srgbClr val="15324A"/>
+                          </a:solidFill>
+                          <a:latin typeface="Calibri"/>
+                        </a:rPr>
+                        <a:t>36538979</a:t>
+                      </a:r>
+                    </a:p>
+                  </a:txBody>
+                  <a:tcPr>
+                    <a:solidFill>
+                      <a:srgbClr val="EDF3F7"/>
+                    </a:solidFill>
+                  </a:tcPr>
+                </a:tc>
+                <a:tc>
+                  <a:txBody>
+                    <a:bodyPr/>
+                    <a:lstStyle/>
+                    <a:p>
+                      <a:pPr algn="l"/>
+                      <a:r>
+                        <a:rPr sz="800">
+                          <a:solidFill>
+                            <a:srgbClr val="15324A"/>
+                          </a:solidFill>
+                          <a:latin typeface="Calibri"/>
+                        </a:rPr>
+                        <a:t>Nopsopon T et al.</a:t>
+                      </a:r>
+                    </a:p>
+                  </a:txBody>
+                  <a:tcPr>
+                    <a:solidFill>
+                      <a:srgbClr val="EDF3F7"/>
+                    </a:solidFill>
+                  </a:tcPr>
+                </a:tc>
+                <a:tc>
+                  <a:txBody>
+                    <a:bodyPr/>
+                    <a:lstStyle/>
+                    <a:p>
+                      <a:pPr algn="l"/>
+                      <a:r>
+                        <a:rPr sz="800">
+                          <a:solidFill>
+                            <a:srgbClr val="15324A"/>
+                          </a:solidFill>
+                          <a:latin typeface="Calibri"/>
+                        </a:rPr>
                         <a:t>2023</a:t>
                       </a:r>
                     </a:p>
                   </a:txBody>
                   <a:tcPr>
                     <a:solidFill>
+                      <a:srgbClr val="EDF3F7"/>
+                    </a:solidFill>
+                  </a:tcPr>
+                </a:tc>
+                <a:tc>
+                  <a:txBody>
+                    <a:bodyPr/>
+                    <a:lstStyle/>
+                    <a:p>
+                      <a:pPr algn="l"/>
+                      <a:r>
+                        <a:rPr sz="800">
+                          <a:solidFill>
+                            <a:srgbClr val="15324A"/>
+                          </a:solidFill>
+                          <a:latin typeface="Calibri"/>
+                        </a:rPr>
+                        <a:t>The Journal of allergy and cli</a:t>
+                      </a:r>
+                    </a:p>
+                  </a:txBody>
+                  <a:tcPr>
+                    <a:solidFill>
+                      <a:srgbClr val="EDF3F7"/>
+                    </a:solidFill>
+                  </a:tcPr>
+                </a:tc>
+                <a:tc>
+                  <a:txBody>
+                    <a:bodyPr/>
+                    <a:lstStyle/>
+                    <a:p>
+                      <a:pPr algn="l"/>
+                      <a:r>
+                        <a:rPr sz="800">
+                          <a:solidFill>
+                            <a:srgbClr val="15324A"/>
+                          </a:solidFill>
+                          <a:latin typeface="Calibri"/>
+                        </a:rPr>
+                        <a:t>Comparative efficacy of tezepelumab to mepolizumab, benralizumab, and </a:t>
+                      </a:r>
+                    </a:p>
+                  </a:txBody>
+                  <a:tcPr>
+                    <a:solidFill>
+                      <a:srgbClr val="EDF3F7"/>
+                    </a:solidFill>
+                  </a:tcPr>
+                </a:tc>
+              </a:tr>
+              <a:tr h="589280">
+                <a:tc>
+                  <a:txBody>
+                    <a:bodyPr/>
+                    <a:lstStyle/>
+                    <a:p>
+                      <a:pPr algn="l"/>
+                      <a:r>
+                        <a:rPr sz="800">
+                          <a:solidFill>
+                            <a:srgbClr val="15324A"/>
+                          </a:solidFill>
+                          <a:latin typeface="Calibri"/>
+                        </a:rPr>
+                        <a:t>32350100</a:t>
+                      </a:r>
+                    </a:p>
+                  </a:txBody>
+                  <a:tcPr>
+                    <a:solidFill>
                       <a:srgbClr val="FFFFFF"/>
                     </a:solidFill>
                   </a:tcPr>
@@ -4003,7 +4122,7 @@
                           </a:solidFill>
                           <a:latin typeface="Calibri"/>
                         </a:rPr>
-                        <a:t>Nephrology, dialysis, transpla</a:t>
+                        <a:t>Hansen ESH et al.</a:t>
                       </a:r>
                     </a:p>
                   </a:txBody>
@@ -4026,7 +4145,7 @@
                           </a:solidFill>
                           <a:latin typeface="Calibri"/>
                         </a:rPr>
-                        <a:t>Far infrared treatment on the arteriovenous fistula induces changes in</a:t>
+                        <a:t>2020</a:t>
                       </a:r>
                     </a:p>
                   </a:txBody>
@@ -4036,8 +4155,54 @@
                     </a:solidFill>
                   </a:tcPr>
                 </a:tc>
+                <a:tc>
+                  <a:txBody>
+                    <a:bodyPr/>
+                    <a:lstStyle/>
+                    <a:p>
+                      <a:pPr algn="l"/>
+                      <a:r>
+                        <a:rPr sz="800">
+                          <a:solidFill>
+                            <a:srgbClr val="15324A"/>
+                          </a:solidFill>
+                          <a:latin typeface="Calibri"/>
+                        </a:rPr>
+                        <a:t>The European respiratory journ</a:t>
+                      </a:r>
+                    </a:p>
+                  </a:txBody>
+                  <a:tcPr>
+                    <a:solidFill>
+                      <a:srgbClr val="FFFFFF"/>
+                    </a:solidFill>
+                  </a:tcPr>
+                </a:tc>
+                <a:tc>
+                  <a:txBody>
+                    <a:bodyPr/>
+                    <a:lstStyle/>
+                    <a:p>
+                      <a:pPr algn="l"/>
+                      <a:r>
+                        <a:rPr sz="800">
+                          <a:solidFill>
+                            <a:srgbClr val="15324A"/>
+                          </a:solidFill>
+                          <a:latin typeface="Calibri"/>
+                        </a:rPr>
+                        <a:t>Effect of aerobic exercise training on asthma in adults: a systematic </a:t>
+                      </a:r>
+                    </a:p>
+                  </a:txBody>
+                  <a:tcPr>
+                    <a:solidFill>
+                      <a:srgbClr val="FFFFFF"/>
+                    </a:solidFill>
+                  </a:tcPr>
+                </a:tc>
               </a:tr>
-              <a:tr h="1767840">
+              <a:tr h="589280">
                 <a:tc>
                   <a:txBody>
                     <a:bodyPr/>
@@ -4051,7 +4216,7 @@
                           </a:solidFill>
                           <a:latin typeface="Calibri"/>
                         </a:rPr>
-                        <a:t>12566672</a:t>
+                        <a:t>39421966</a:t>
                       </a:r>
                     </a:p>
                   </a:txBody>
@@ -4074,7 +4239,7 @@
                           </a:solidFill>
                           <a:latin typeface="Calibri"/>
                         </a:rPr>
-                        <a:t>Lemson S et al.</a:t>
+                        <a:t>Fedora K et al.</a:t>
                       </a:r>
                     </a:p>
                   </a:txBody>
@@ -4097,7 +4262,7 @@
                           </a:solidFill>
                           <a:latin typeface="Calibri"/>
                         </a:rPr>
-                        <a:t>2002</a:t>
+                        <a:t>2024</a:t>
                       </a:r>
                     </a:p>
                   </a:txBody>
@@ -4120,7 +4285,7 @@
                           </a:solidFill>
                           <a:latin typeface="Calibri"/>
                         </a:rPr>
-                        <a:t>Blood purification</a:t>
+                        <a:t>Annals of medicine</a:t>
                       </a:r>
                     </a:p>
                   </a:txBody>
@@ -4143,7 +4308,475 @@
                           </a:solidFill>
                           <a:latin typeface="Calibri"/>
                         </a:rPr>
-                        <a:t>Hemodynamics of venous cuff interposition in prosthetic arteriovenous </a:t>
+                        <a:t>Vitamin D supplementation decrease asthma exacerbations in children: a</a:t>
+                      </a:r>
+                    </a:p>
+                  </a:txBody>
+                  <a:tcPr>
+                    <a:solidFill>
+                      <a:srgbClr val="EDF3F7"/>
+                    </a:solidFill>
+                  </a:tcPr>
+                </a:tc>
+              </a:tr>
+              <a:tr h="589280">
+                <a:tc>
+                  <a:txBody>
+                    <a:bodyPr/>
+                    <a:lstStyle/>
+                    <a:p>
+                      <a:pPr algn="l"/>
+                      <a:r>
+                        <a:rPr sz="800">
+                          <a:solidFill>
+                            <a:srgbClr val="15324A"/>
+                          </a:solidFill>
+                          <a:latin typeface="Calibri"/>
+                        </a:rPr>
+                        <a:t>37286218</a:t>
+                      </a:r>
+                    </a:p>
+                  </a:txBody>
+                  <a:tcPr>
+                    <a:solidFill>
+                      <a:srgbClr val="FFFFFF"/>
+                    </a:solidFill>
+                  </a:tcPr>
+                </a:tc>
+                <a:tc>
+                  <a:txBody>
+                    <a:bodyPr/>
+                    <a:lstStyle/>
+                    <a:p>
+                      <a:pPr algn="l"/>
+                      <a:r>
+                        <a:rPr sz="800">
+                          <a:solidFill>
+                            <a:srgbClr val="15324A"/>
+                          </a:solidFill>
+                          <a:latin typeface="Calibri"/>
+                        </a:rPr>
+                        <a:t>Makrufardi F et al.</a:t>
+                      </a:r>
+                    </a:p>
+                  </a:txBody>
+                  <a:tcPr>
+                    <a:solidFill>
+                      <a:srgbClr val="FFFFFF"/>
+                    </a:solidFill>
+                  </a:tcPr>
+                </a:tc>
+                <a:tc>
+                  <a:txBody>
+                    <a:bodyPr/>
+                    <a:lstStyle/>
+                    <a:p>
+                      <a:pPr algn="l"/>
+                      <a:r>
+                        <a:rPr sz="800">
+                          <a:solidFill>
+                            <a:srgbClr val="15324A"/>
+                          </a:solidFill>
+                          <a:latin typeface="Calibri"/>
+                        </a:rPr>
+                        <a:t>2023</a:t>
+                      </a:r>
+                    </a:p>
+                  </a:txBody>
+                  <a:tcPr>
+                    <a:solidFill>
+                      <a:srgbClr val="FFFFFF"/>
+                    </a:solidFill>
+                  </a:tcPr>
+                </a:tc>
+                <a:tc>
+                  <a:txBody>
+                    <a:bodyPr/>
+                    <a:lstStyle/>
+                    <a:p>
+                      <a:pPr algn="l"/>
+                      <a:r>
+                        <a:rPr sz="800">
+                          <a:solidFill>
+                            <a:srgbClr val="15324A"/>
+                          </a:solidFill>
+                          <a:latin typeface="Calibri"/>
+                        </a:rPr>
+                        <a:t>European respiratory review : </a:t>
+                      </a:r>
+                    </a:p>
+                  </a:txBody>
+                  <a:tcPr>
+                    <a:solidFill>
+                      <a:srgbClr val="FFFFFF"/>
+                    </a:solidFill>
+                  </a:tcPr>
+                </a:tc>
+                <a:tc>
+                  <a:txBody>
+                    <a:bodyPr/>
+                    <a:lstStyle/>
+                    <a:p>
+                      <a:pPr algn="l"/>
+                      <a:r>
+                        <a:rPr sz="800">
+                          <a:solidFill>
+                            <a:srgbClr val="15324A"/>
+                          </a:solidFill>
+                          <a:latin typeface="Calibri"/>
+                        </a:rPr>
+                        <a:t>Extreme weather and asthma: a systematic review and meta-analysis.</a:t>
+                      </a:r>
+                    </a:p>
+                  </a:txBody>
+                  <a:tcPr>
+                    <a:solidFill>
+                      <a:srgbClr val="FFFFFF"/>
+                    </a:solidFill>
+                  </a:tcPr>
+                </a:tc>
+              </a:tr>
+              <a:tr h="589280">
+                <a:tc>
+                  <a:txBody>
+                    <a:bodyPr/>
+                    <a:lstStyle/>
+                    <a:p>
+                      <a:pPr algn="l"/>
+                      <a:r>
+                        <a:rPr sz="800">
+                          <a:solidFill>
+                            <a:srgbClr val="15324A"/>
+                          </a:solidFill>
+                          <a:latin typeface="Calibri"/>
+                        </a:rPr>
+                        <a:t>38657997</a:t>
+                      </a:r>
+                    </a:p>
+                  </a:txBody>
+                  <a:tcPr>
+                    <a:solidFill>
+                      <a:srgbClr val="EDF3F7"/>
+                    </a:solidFill>
+                  </a:tcPr>
+                </a:tc>
+                <a:tc>
+                  <a:txBody>
+                    <a:bodyPr/>
+                    <a:lstStyle/>
+                    <a:p>
+                      <a:pPr algn="l"/>
+                      <a:r>
+                        <a:rPr sz="800">
+                          <a:solidFill>
+                            <a:srgbClr val="15324A"/>
+                          </a:solidFill>
+                          <a:latin typeface="Calibri"/>
+                        </a:rPr>
+                        <a:t>Kyriakopoulos C et al.</a:t>
+                      </a:r>
+                    </a:p>
+                  </a:txBody>
+                  <a:tcPr>
+                    <a:solidFill>
+                      <a:srgbClr val="EDF3F7"/>
+                    </a:solidFill>
+                  </a:tcPr>
+                </a:tc>
+                <a:tc>
+                  <a:txBody>
+                    <a:bodyPr/>
+                    <a:lstStyle/>
+                    <a:p>
+                      <a:pPr algn="l"/>
+                      <a:r>
+                        <a:rPr sz="800">
+                          <a:solidFill>
+                            <a:srgbClr val="15324A"/>
+                          </a:solidFill>
+                          <a:latin typeface="Calibri"/>
+                        </a:rPr>
+                        <a:t>2024</a:t>
+                      </a:r>
+                    </a:p>
+                  </a:txBody>
+                  <a:tcPr>
+                    <a:solidFill>
+                      <a:srgbClr val="EDF3F7"/>
+                    </a:solidFill>
+                  </a:tcPr>
+                </a:tc>
+                <a:tc>
+                  <a:txBody>
+                    <a:bodyPr/>
+                    <a:lstStyle/>
+                    <a:p>
+                      <a:pPr algn="l"/>
+                      <a:r>
+                        <a:rPr sz="800">
+                          <a:solidFill>
+                            <a:srgbClr val="15324A"/>
+                          </a:solidFill>
+                          <a:latin typeface="Calibri"/>
+                        </a:rPr>
+                        <a:t>European respiratory review : </a:t>
+                      </a:r>
+                    </a:p>
+                  </a:txBody>
+                  <a:tcPr>
+                    <a:solidFill>
+                      <a:srgbClr val="EDF3F7"/>
+                    </a:solidFill>
+                  </a:tcPr>
+                </a:tc>
+                <a:tc>
+                  <a:txBody>
+                    <a:bodyPr/>
+                    <a:lstStyle/>
+                    <a:p>
+                      <a:pPr algn="l"/>
+                      <a:r>
+                        <a:rPr sz="800">
+                          <a:solidFill>
+                            <a:srgbClr val="15324A"/>
+                          </a:solidFill>
+                          <a:latin typeface="Calibri"/>
+                        </a:rPr>
+                        <a:t>Biologic agents licensed for severe asthma: a systematic review and me</a:t>
+                      </a:r>
+                    </a:p>
+                  </a:txBody>
+                  <a:tcPr>
+                    <a:solidFill>
+                      <a:srgbClr val="EDF3F7"/>
+                    </a:solidFill>
+                  </a:tcPr>
+                </a:tc>
+              </a:tr>
+              <a:tr h="589280">
+                <a:tc>
+                  <a:txBody>
+                    <a:bodyPr/>
+                    <a:lstStyle/>
+                    <a:p>
+                      <a:pPr algn="l"/>
+                      <a:r>
+                        <a:rPr sz="800">
+                          <a:solidFill>
+                            <a:srgbClr val="15324A"/>
+                          </a:solidFill>
+                          <a:latin typeface="Calibri"/>
+                        </a:rPr>
+                        <a:t>39384302</a:t>
+                      </a:r>
+                    </a:p>
+                  </a:txBody>
+                  <a:tcPr>
+                    <a:solidFill>
+                      <a:srgbClr val="FFFFFF"/>
+                    </a:solidFill>
+                  </a:tcPr>
+                </a:tc>
+                <a:tc>
+                  <a:txBody>
+                    <a:bodyPr/>
+                    <a:lstStyle/>
+                    <a:p>
+                      <a:pPr algn="l"/>
+                      <a:r>
+                        <a:rPr sz="800">
+                          <a:solidFill>
+                            <a:srgbClr val="15324A"/>
+                          </a:solidFill>
+                          <a:latin typeface="Calibri"/>
+                        </a:rPr>
+                        <a:t>Manti S et al.</a:t>
+                      </a:r>
+                    </a:p>
+                  </a:txBody>
+                  <a:tcPr>
+                    <a:solidFill>
+                      <a:srgbClr val="FFFFFF"/>
+                    </a:solidFill>
+                  </a:tcPr>
+                </a:tc>
+                <a:tc>
+                  <a:txBody>
+                    <a:bodyPr/>
+                    <a:lstStyle/>
+                    <a:p>
+                      <a:pPr algn="l"/>
+                      <a:r>
+                        <a:rPr sz="800">
+                          <a:solidFill>
+                            <a:srgbClr val="15324A"/>
+                          </a:solidFill>
+                          <a:latin typeface="Calibri"/>
+                        </a:rPr>
+                        <a:t>2024</a:t>
+                      </a:r>
+                    </a:p>
+                  </a:txBody>
+                  <a:tcPr>
+                    <a:solidFill>
+                      <a:srgbClr val="FFFFFF"/>
+                    </a:solidFill>
+                  </a:tcPr>
+                </a:tc>
+                <a:tc>
+                  <a:txBody>
+                    <a:bodyPr/>
+                    <a:lstStyle/>
+                    <a:p>
+                      <a:pPr algn="l"/>
+                      <a:r>
+                        <a:rPr sz="800">
+                          <a:solidFill>
+                            <a:srgbClr val="15324A"/>
+                          </a:solidFill>
+                          <a:latin typeface="Calibri"/>
+                        </a:rPr>
+                        <a:t>European respiratory review : </a:t>
+                      </a:r>
+                    </a:p>
+                  </a:txBody>
+                  <a:tcPr>
+                    <a:solidFill>
+                      <a:srgbClr val="FFFFFF"/>
+                    </a:solidFill>
+                  </a:tcPr>
+                </a:tc>
+                <a:tc>
+                  <a:txBody>
+                    <a:bodyPr/>
+                    <a:lstStyle/>
+                    <a:p>
+                      <a:pPr algn="l"/>
+                      <a:r>
+                        <a:rPr sz="800">
+                          <a:solidFill>
+                            <a:srgbClr val="15324A"/>
+                          </a:solidFill>
+                          <a:latin typeface="Calibri"/>
+                        </a:rPr>
+                        <a:t>Epidemiology of severe asthma in children: a systematic review and met</a:t>
+                      </a:r>
+                    </a:p>
+                  </a:txBody>
+                  <a:tcPr>
+                    <a:solidFill>
+                      <a:srgbClr val="FFFFFF"/>
+                    </a:solidFill>
+                  </a:tcPr>
+                </a:tc>
+              </a:tr>
+              <a:tr h="589280">
+                <a:tc>
+                  <a:txBody>
+                    <a:bodyPr/>
+                    <a:lstStyle/>
+                    <a:p>
+                      <a:pPr algn="l"/>
+                      <a:r>
+                        <a:rPr sz="800">
+                          <a:solidFill>
+                            <a:srgbClr val="15324A"/>
+                          </a:solidFill>
+                          <a:latin typeface="Calibri"/>
+                        </a:rPr>
+                        <a:t>39549709</a:t>
+                      </a:r>
+                    </a:p>
+                  </a:txBody>
+                  <a:tcPr>
+                    <a:solidFill>
+                      <a:srgbClr val="EDF3F7"/>
+                    </a:solidFill>
+                  </a:tcPr>
+                </a:tc>
+                <a:tc>
+                  <a:txBody>
+                    <a:bodyPr/>
+                    <a:lstStyle/>
+                    <a:p>
+                      <a:pPr algn="l"/>
+                      <a:r>
+                        <a:rPr sz="800">
+                          <a:solidFill>
+                            <a:srgbClr val="15324A"/>
+                          </a:solidFill>
+                          <a:latin typeface="Calibri"/>
+                        </a:rPr>
+                        <a:t>Shackleford A et al.</a:t>
+                      </a:r>
+                    </a:p>
+                  </a:txBody>
+                  <a:tcPr>
+                    <a:solidFill>
+                      <a:srgbClr val="EDF3F7"/>
+                    </a:solidFill>
+                  </a:tcPr>
+                </a:tc>
+                <a:tc>
+                  <a:txBody>
+                    <a:bodyPr/>
+                    <a:lstStyle/>
+                    <a:p>
+                      <a:pPr algn="l"/>
+                      <a:r>
+                        <a:rPr sz="800">
+                          <a:solidFill>
+                            <a:srgbClr val="15324A"/>
+                          </a:solidFill>
+                          <a:latin typeface="Calibri"/>
+                        </a:rPr>
+                        <a:t>2025</a:t>
+                      </a:r>
+                    </a:p>
+                  </a:txBody>
+                  <a:tcPr>
+                    <a:solidFill>
+                      <a:srgbClr val="EDF3F7"/>
+                    </a:solidFill>
+                  </a:tcPr>
+                </a:tc>
+                <a:tc>
+                  <a:txBody>
+                    <a:bodyPr/>
+                    <a:lstStyle/>
+                    <a:p>
+                      <a:pPr algn="l"/>
+                      <a:r>
+                        <a:rPr sz="800">
+                          <a:solidFill>
+                            <a:srgbClr val="15324A"/>
+                          </a:solidFill>
+                          <a:latin typeface="Calibri"/>
+                        </a:rPr>
+                        <a:t>The Lancet. Respiratory medici</a:t>
+                      </a:r>
+                    </a:p>
+                  </a:txBody>
+                  <a:tcPr>
+                    <a:solidFill>
+                      <a:srgbClr val="EDF3F7"/>
+                    </a:solidFill>
+                  </a:tcPr>
+                </a:tc>
+                <a:tc>
+                  <a:txBody>
+                    <a:bodyPr/>
+                    <a:lstStyle/>
+                    <a:p>
+                      <a:pPr algn="l"/>
+                      <a:r>
+                        <a:rPr sz="800">
+                          <a:solidFill>
+                            <a:srgbClr val="15324A"/>
+                          </a:solidFill>
+                          <a:latin typeface="Calibri"/>
+                        </a:rPr>
+                        <a:t>Clinical remission attainment, definitions, and correlates among patie</a:t>
                       </a:r>
                     </a:p>
                   </a:txBody>
@@ -4160,7 +4793,7 @@
       </p:graphicFrame>
       <p:sp>
         <p:nvSpPr>
-          <p:cNvPr id="8" name="TextBox 7"/>
+          <p:cNvPr id="6" name="TextBox 5"/>
           <p:cNvSpPr txBox="1"/>
           <p:nvPr/>
         </p:nvSpPr>
@@ -4189,6 +4822,76 @@
                 <a:latin typeface="Calibri"/>
               </a:rPr>
               <a:t>Source: PubMed / NCBI E-utilities (free access). All citations are auditable and traceable.</a:t>
+            </a:r>
+          </a:p>
+        </p:txBody>
+      </p:sp>
+      <p:sp>
+        <p:nvSpPr>
+          <p:cNvPr id="7" name="TextBox 6"/>
+          <p:cNvSpPr txBox="1"/>
+          <p:nvPr/>
+        </p:nvSpPr>
+        <p:spPr>
+          <a:xfrm>
+            <a:off x="182880" y="6583680"/>
+            <a:ext cx="8229600" cy="228600"/>
+          </a:xfrm>
+          <a:prstGeom prst="rect">
+            <a:avLst/>
+          </a:prstGeom>
+          <a:noFill/>
+        </p:spPr>
+        <p:txBody>
+          <a:bodyPr wrap="square">
+            <a:spAutoFit/>
+          </a:bodyPr>
+          <a:lstStyle/>
+          <a:p>
+            <a:pPr algn="l"/>
+            <a:r>
+              <a:rPr sz="700" b="0">
+                <a:solidFill>
+                  <a:srgbClr val="5F6B7A"/>
+                </a:solidFill>
+                <a:latin typeface="Calibri"/>
+              </a:rPr>
+              <a:t>Trial Design Explorer | Clinical Trial Planning Intelligence | Confidential draft</a:t>
+            </a:r>
+          </a:p>
+        </p:txBody>
+      </p:sp>
+      <p:sp>
+        <p:nvSpPr>
+          <p:cNvPr id="8" name="TextBox 7"/>
+          <p:cNvSpPr txBox="1"/>
+          <p:nvPr/>
+        </p:nvSpPr>
+        <p:spPr>
+          <a:xfrm>
+            <a:off x="11247120" y="6583680"/>
+            <a:ext cx="914400" cy="228600"/>
+          </a:xfrm>
+          <a:prstGeom prst="rect">
+            <a:avLst/>
+          </a:prstGeom>
+          <a:noFill/>
+        </p:spPr>
+        <p:txBody>
+          <a:bodyPr wrap="square">
+            <a:spAutoFit/>
+          </a:bodyPr>
+          <a:lstStyle/>
+          <a:p>
+            <a:pPr algn="r"/>
+            <a:r>
+              <a:rPr sz="700" b="0">
+                <a:solidFill>
+                  <a:srgbClr val="5F6B7A"/>
+                </a:solidFill>
+                <a:latin typeface="Calibri"/>
+              </a:rPr>
+              <a:t>10 / 12</a:t>
             </a:r>
           </a:p>
         </p:txBody>
@@ -4324,79 +5027,9 @@
           </a:p>
         </p:txBody>
       </p:sp>
-      <p:sp>
-        <p:nvSpPr>
-          <p:cNvPr id="5" name="TextBox 4"/>
-          <p:cNvSpPr txBox="1"/>
-          <p:nvPr/>
-        </p:nvSpPr>
-        <p:spPr>
-          <a:xfrm>
-            <a:off x="182880" y="6583680"/>
-            <a:ext cx="8229600" cy="228600"/>
-          </a:xfrm>
-          <a:prstGeom prst="rect">
-            <a:avLst/>
-          </a:prstGeom>
-          <a:noFill/>
-        </p:spPr>
-        <p:txBody>
-          <a:bodyPr wrap="square">
-            <a:spAutoFit/>
-          </a:bodyPr>
-          <a:lstStyle/>
-          <a:p>
-            <a:pPr algn="l"/>
-            <a:r>
-              <a:rPr sz="700" b="0">
-                <a:solidFill>
-                  <a:srgbClr val="5F6B7A"/>
-                </a:solidFill>
-                <a:latin typeface="Calibri"/>
-              </a:rPr>
-              <a:t>Trial Design Explorer | Clinical Trial Planning Intelligence | Confidential draft</a:t>
-            </a:r>
-          </a:p>
-        </p:txBody>
-      </p:sp>
-      <p:sp>
-        <p:nvSpPr>
-          <p:cNvPr id="6" name="TextBox 5"/>
-          <p:cNvSpPr txBox="1"/>
-          <p:nvPr/>
-        </p:nvSpPr>
-        <p:spPr>
-          <a:xfrm>
-            <a:off x="11247120" y="6583680"/>
-            <a:ext cx="914400" cy="228600"/>
-          </a:xfrm>
-          <a:prstGeom prst="rect">
-            <a:avLst/>
-          </a:prstGeom>
-          <a:noFill/>
-        </p:spPr>
-        <p:txBody>
-          <a:bodyPr wrap="square">
-            <a:spAutoFit/>
-          </a:bodyPr>
-          <a:lstStyle/>
-          <a:p>
-            <a:pPr algn="r"/>
-            <a:r>
-              <a:rPr sz="700" b="0">
-                <a:solidFill>
-                  <a:srgbClr val="5F6B7A"/>
-                </a:solidFill>
-                <a:latin typeface="Calibri"/>
-              </a:rPr>
-              <a:t>11 / 11</a:t>
-            </a:r>
-          </a:p>
-        </p:txBody>
-      </p:sp>
       <p:graphicFrame>
         <p:nvGraphicFramePr>
-          <p:cNvPr id="7" name="Table 6"/>
+          <p:cNvPr id="5" name="Table 4"/>
           <p:cNvGraphicFramePr>
             <a:graphicFrameLocks noGrp="1"/>
           </p:cNvGraphicFramePr>
@@ -4420,7 +5053,7 @@
                 <a:gridCol w="1950720"/>
                 <a:gridCol w="1950720"/>
               </a:tblGrid>
-              <a:tr h="619760">
+              <a:tr h="507076">
                 <a:tc>
                   <a:txBody>
                     <a:bodyPr/>
@@ -4560,7 +5193,7 @@
                   </a:tcPr>
                 </a:tc>
               </a:tr>
-              <a:tr h="619760">
+              <a:tr h="507076">
                 <a:tc>
                   <a:txBody>
                     <a:bodyPr/>
@@ -4620,7 +5253,7 @@
                           </a:solidFill>
                           <a:latin typeface="Calibri"/>
                         </a:rPr>
-                        <a:t>NCT05372952</a:t>
+                        <a:t>NCT01012739</a:t>
                       </a:r>
                     </a:p>
                   </a:txBody>
@@ -4643,7 +5276,7 @@
                           </a:solidFill>
                           <a:latin typeface="Calibri"/>
                         </a:rPr>
-                        <a:t>An Investigator Initiated Trial to Evaluate the Safety and Feasibility of the Dy</a:t>
+                        <a:t>Efficacy, Safety, Tolerability, and Pharmacokinetics of Indacaterol Maleate Via </a:t>
                       </a:r>
                     </a:p>
                   </a:txBody>
@@ -4666,7 +5299,7 @@
                           </a:solidFill>
                           <a:latin typeface="Calibri"/>
                         </a:rPr>
-                        <a:t>25</a:t>
+                        <a:t>35.0</a:t>
                       </a:r>
                     </a:p>
                   </a:txBody>
@@ -4689,7 +5322,7 @@
                           </a:solidFill>
                           <a:latin typeface="Calibri"/>
                         </a:rPr>
-                        <a:t>Klinikum Arnsberg</a:t>
+                        <a:t>Novartis Pharmaceuticals</a:t>
                       </a:r>
                     </a:p>
                   </a:txBody>
@@ -4700,7 +5333,7 @@
                   </a:tcPr>
                 </a:tc>
               </a:tr>
-              <a:tr h="619760">
+              <a:tr h="507076">
                 <a:tc>
                   <a:txBody>
                     <a:bodyPr/>
@@ -4760,7 +5393,7 @@
                           </a:solidFill>
                           <a:latin typeface="Calibri"/>
                         </a:rPr>
-                        <a:t>NCT03270358</a:t>
+                        <a:t>NCT01959412</a:t>
                       </a:r>
                     </a:p>
                   </a:txBody>
@@ -4783,7 +5416,7 @@
                           </a:solidFill>
                           <a:latin typeface="Calibri"/>
                         </a:rPr>
-                        <a:t>OStéopontin as a Marker Of StenoSIS - OSMOSIS</a:t>
+                        <a:t>Crossover Study to Evaluate the Efficacy, Safety and Tolerability of Different D</a:t>
                       </a:r>
                     </a:p>
                   </a:txBody>
@@ -4806,7 +5439,7 @@
                           </a:solidFill>
                           <a:latin typeface="Calibri"/>
                         </a:rPr>
-                        <a:t>76</a:t>
+                        <a:t>91.0</a:t>
                       </a:r>
                     </a:p>
                   </a:txBody>
@@ -4829,7 +5462,7 @@
                           </a:solidFill>
                           <a:latin typeface="Calibri"/>
                         </a:rPr>
-                        <a:t>Centre Hospitalier Universitaire de Nice</a:t>
+                        <a:t>Novartis Pharmaceuticals</a:t>
                       </a:r>
                     </a:p>
                   </a:txBody>
@@ -4840,7 +5473,7 @@
                   </a:tcPr>
                 </a:tc>
               </a:tr>
-              <a:tr h="619760">
+              <a:tr h="507076">
                 <a:tc>
                   <a:txBody>
                     <a:bodyPr/>
@@ -4900,7 +5533,7 @@
                           </a:solidFill>
                           <a:latin typeface="Calibri"/>
                         </a:rPr>
-                        <a:t>NCT02335099</a:t>
+                        <a:t>NCT01820481</a:t>
                       </a:r>
                     </a:p>
                   </a:txBody>
@@ -4923,7 +5556,7 @@
                           </a:solidFill>
                           <a:latin typeface="Calibri"/>
                         </a:rPr>
-                        <a:t>Determine the Safety/Efficacy of Ticagrelor for Maintaining Patency of Arterio-V</a:t>
+                        <a:t>Safety and Efficacy of WIN-901X in Asthma</a:t>
                       </a:r>
                     </a:p>
                   </a:txBody>
@@ -4946,7 +5579,7 @@
                           </a:solidFill>
                           <a:latin typeface="Calibri"/>
                         </a:rPr>
-                        <a:t>54</a:t>
+                        <a:t>209.0</a:t>
                       </a:r>
                     </a:p>
                   </a:txBody>
@@ -4969,7 +5602,7 @@
                           </a:solidFill>
                           <a:latin typeface="Calibri"/>
                         </a:rPr>
-                        <a:t>University of Virginia</a:t>
+                        <a:t>Whanin Pharmaceutical Company</a:t>
                       </a:r>
                     </a:p>
                   </a:txBody>
@@ -4980,7 +5613,7 @@
                   </a:tcPr>
                 </a:tc>
               </a:tr>
-              <a:tr h="619760">
+              <a:tr h="507076">
                 <a:tc>
                   <a:txBody>
                     <a:bodyPr/>
@@ -5040,7 +5673,7 @@
                           </a:solidFill>
                           <a:latin typeface="Calibri"/>
                         </a:rPr>
-                        <a:t>NCT04226599</a:t>
+                        <a:t>NCT00980200</a:t>
                       </a:r>
                     </a:p>
                   </a:txBody>
@@ -5063,7 +5696,7 @@
                           </a:solidFill>
                           <a:latin typeface="Calibri"/>
                         </a:rPr>
-                        <a:t>A Safety and Efficacy Study of Hemodialysis Arteriovenous Fistulae Stenosis Trea</a:t>
+                        <a:t>Efficacy and Safety Study in Subjects With Asthma</a:t>
                       </a:r>
                     </a:p>
                   </a:txBody>
@@ -5086,7 +5719,7 @@
                           </a:solidFill>
                           <a:latin typeface="Calibri"/>
                         </a:rPr>
-                        <a:t>220</a:t>
+                        <a:t>75.0</a:t>
                       </a:r>
                     </a:p>
                   </a:txBody>
@@ -5109,7 +5742,7 @@
                           </a:solidFill>
                           <a:latin typeface="Calibri"/>
                         </a:rPr>
-                        <a:t>DK Medical Technology (Suzhou) Co., Ltd.</a:t>
+                        <a:t>GlaxoSmithKline</a:t>
                       </a:r>
                     </a:p>
                   </a:txBody>
@@ -5120,7 +5753,7 @@
                   </a:tcPr>
                 </a:tc>
               </a:tr>
-              <a:tr h="619760">
+              <a:tr h="507076">
                 <a:tc>
                   <a:txBody>
                     <a:bodyPr/>
@@ -5157,7 +5790,7 @@
                           </a:solidFill>
                           <a:latin typeface="Calibri"/>
                         </a:rPr>
-                        <a:t>Terminated</a:t>
+                        <a:t>Withdrawn</a:t>
                       </a:r>
                     </a:p>
                   </a:txBody>
@@ -5180,7 +5813,7 @@
                           </a:solidFill>
                           <a:latin typeface="Calibri"/>
                         </a:rPr>
-                        <a:t>NCT02224235</a:t>
+                        <a:t>NCT01435902</a:t>
                       </a:r>
                     </a:p>
                   </a:txBody>
@@ -5203,7 +5836,7 @@
                           </a:solidFill>
                           <a:latin typeface="Calibri"/>
                         </a:rPr>
-                        <a:t>COBRA SHIELD OCT Study</a:t>
+                        <a:t>A Study of a New Asthma Medicine in Asthmatics Whose Asthma Worsens With Exercis</a:t>
                       </a:r>
                     </a:p>
                   </a:txBody>
@@ -5226,7 +5859,7 @@
                           </a:solidFill>
                           <a:latin typeface="Calibri"/>
                         </a:rPr>
-                        <a:t>8</a:t>
+                        <a:t>0.0</a:t>
                       </a:r>
                     </a:p>
                   </a:txBody>
@@ -5249,7 +5882,7 @@
                           </a:solidFill>
                           <a:latin typeface="Calibri"/>
                         </a:rPr>
-                        <a:t>CeloNova BioSciences, Inc.</a:t>
+                        <a:t>GlaxoSmithKline</a:t>
                       </a:r>
                     </a:p>
                   </a:txBody>
@@ -5260,7 +5893,7 @@
                   </a:tcPr>
                 </a:tc>
               </a:tr>
-              <a:tr h="619760">
+              <a:tr h="507076">
                 <a:tc>
                   <a:txBody>
                     <a:bodyPr/>
@@ -5297,7 +5930,7 @@
                           </a:solidFill>
                           <a:latin typeface="Calibri"/>
                         </a:rPr>
-                        <a:t>Terminated</a:t>
+                        <a:t>Withdrawn</a:t>
                       </a:r>
                     </a:p>
                   </a:txBody>
@@ -5320,7 +5953,7 @@
                           </a:solidFill>
                           <a:latin typeface="Calibri"/>
                         </a:rPr>
-                        <a:t>NCT02913274</a:t>
+                        <a:t>NCT01923272</a:t>
                       </a:r>
                     </a:p>
                   </a:txBody>
@@ -5343,7 +5976,7 @@
                           </a:solidFill>
                           <a:latin typeface="Calibri"/>
                         </a:rPr>
-                        <a:t>Arteriovenous Fistulae: Drug-eluting Balloon Angioplasty</a:t>
+                        <a:t>Non-Invasive Neurostimulation of the Vagus Nerve With the AlphaCore Device for t</a:t>
                       </a:r>
                     </a:p>
                   </a:txBody>
@@ -5366,7 +5999,7 @@
                           </a:solidFill>
                           <a:latin typeface="Calibri"/>
                         </a:rPr>
-                        <a:t>115</a:t>
+                        <a:t>0.0</a:t>
                       </a:r>
                     </a:p>
                   </a:txBody>
@@ -5389,7 +6022,7 @@
                           </a:solidFill>
                           <a:latin typeface="Calibri"/>
                         </a:rPr>
-                        <a:t>Rennes University Hospital</a:t>
+                        <a:t>ElectroCore INC</a:t>
                       </a:r>
                     </a:p>
                   </a:txBody>
@@ -5400,7 +6033,7 @@
                   </a:tcPr>
                 </a:tc>
               </a:tr>
-              <a:tr h="619760">
+              <a:tr h="507076">
                 <a:tc>
                   <a:txBody>
                     <a:bodyPr/>
@@ -5414,6 +6047,286 @@
                           </a:solidFill>
                           <a:latin typeface="Calibri"/>
                         </a:rPr>
+                        <a:t>Disrupted Precedent</a:t>
+                      </a:r>
+                    </a:p>
+                  </a:txBody>
+                  <a:tcPr>
+                    <a:solidFill>
+                      <a:srgbClr val="FFFFFF"/>
+                    </a:solidFill>
+                  </a:tcPr>
+                </a:tc>
+                <a:tc>
+                  <a:txBody>
+                    <a:bodyPr/>
+                    <a:lstStyle/>
+                    <a:p>
+                      <a:pPr algn="l"/>
+                      <a:r>
+                        <a:rPr sz="800">
+                          <a:solidFill>
+                            <a:srgbClr val="15324A"/>
+                          </a:solidFill>
+                          <a:latin typeface="Calibri"/>
+                        </a:rPr>
+                        <a:t>Withdrawn</a:t>
+                      </a:r>
+                    </a:p>
+                  </a:txBody>
+                  <a:tcPr>
+                    <a:solidFill>
+                      <a:srgbClr val="FFFFFF"/>
+                    </a:solidFill>
+                  </a:tcPr>
+                </a:tc>
+                <a:tc>
+                  <a:txBody>
+                    <a:bodyPr/>
+                    <a:lstStyle/>
+                    <a:p>
+                      <a:pPr algn="l"/>
+                      <a:r>
+                        <a:rPr sz="800">
+                          <a:solidFill>
+                            <a:srgbClr val="15324A"/>
+                          </a:solidFill>
+                          <a:latin typeface="Calibri"/>
+                        </a:rPr>
+                        <a:t>NCT01845623</a:t>
+                      </a:r>
+                    </a:p>
+                  </a:txBody>
+                  <a:tcPr>
+                    <a:solidFill>
+                      <a:srgbClr val="FFFFFF"/>
+                    </a:solidFill>
+                  </a:tcPr>
+                </a:tc>
+                <a:tc>
+                  <a:txBody>
+                    <a:bodyPr/>
+                    <a:lstStyle/>
+                    <a:p>
+                      <a:pPr algn="l"/>
+                      <a:r>
+                        <a:rPr sz="800">
+                          <a:solidFill>
+                            <a:srgbClr val="15324A"/>
+                          </a:solidFill>
+                          <a:latin typeface="Calibri"/>
+                        </a:rPr>
+                        <a:t>A Study to Evaluate the Effects of Indacaterol Maleate (QAB149) as a New Formula</a:t>
+                      </a:r>
+                    </a:p>
+                  </a:txBody>
+                  <a:tcPr>
+                    <a:solidFill>
+                      <a:srgbClr val="FFFFFF"/>
+                    </a:solidFill>
+                  </a:tcPr>
+                </a:tc>
+                <a:tc>
+                  <a:txBody>
+                    <a:bodyPr/>
+                    <a:lstStyle/>
+                    <a:p>
+                      <a:pPr algn="l"/>
+                      <a:r>
+                        <a:rPr sz="800">
+                          <a:solidFill>
+                            <a:srgbClr val="15324A"/>
+                          </a:solidFill>
+                          <a:latin typeface="Calibri"/>
+                        </a:rPr>
+                        <a:t>0.0</a:t>
+                      </a:r>
+                    </a:p>
+                  </a:txBody>
+                  <a:tcPr>
+                    <a:solidFill>
+                      <a:srgbClr val="FFFFFF"/>
+                    </a:solidFill>
+                  </a:tcPr>
+                </a:tc>
+                <a:tc>
+                  <a:txBody>
+                    <a:bodyPr/>
+                    <a:lstStyle/>
+                    <a:p>
+                      <a:pPr algn="l"/>
+                      <a:r>
+                        <a:rPr sz="800">
+                          <a:solidFill>
+                            <a:srgbClr val="15324A"/>
+                          </a:solidFill>
+                          <a:latin typeface="Calibri"/>
+                        </a:rPr>
+                        <a:t>Novartis Pharmaceuticals</a:t>
+                      </a:r>
+                    </a:p>
+                  </a:txBody>
+                  <a:tcPr>
+                    <a:solidFill>
+                      <a:srgbClr val="FFFFFF"/>
+                    </a:solidFill>
+                  </a:tcPr>
+                </a:tc>
+              </a:tr>
+              <a:tr h="507076">
+                <a:tc>
+                  <a:txBody>
+                    <a:bodyPr/>
+                    <a:lstStyle/>
+                    <a:p>
+                      <a:pPr algn="l"/>
+                      <a:r>
+                        <a:rPr sz="800">
+                          <a:solidFill>
+                            <a:srgbClr val="15324A"/>
+                          </a:solidFill>
+                          <a:latin typeface="Calibri"/>
+                        </a:rPr>
+                        <a:t>Disrupted Precedent</a:t>
+                      </a:r>
+                    </a:p>
+                  </a:txBody>
+                  <a:tcPr>
+                    <a:solidFill>
+                      <a:srgbClr val="EDF3F7"/>
+                    </a:solidFill>
+                  </a:tcPr>
+                </a:tc>
+                <a:tc>
+                  <a:txBody>
+                    <a:bodyPr/>
+                    <a:lstStyle/>
+                    <a:p>
+                      <a:pPr algn="l"/>
+                      <a:r>
+                        <a:rPr sz="800">
+                          <a:solidFill>
+                            <a:srgbClr val="15324A"/>
+                          </a:solidFill>
+                          <a:latin typeface="Calibri"/>
+                        </a:rPr>
+                        <a:t>Withdrawn</a:t>
+                      </a:r>
+                    </a:p>
+                  </a:txBody>
+                  <a:tcPr>
+                    <a:solidFill>
+                      <a:srgbClr val="EDF3F7"/>
+                    </a:solidFill>
+                  </a:tcPr>
+                </a:tc>
+                <a:tc>
+                  <a:txBody>
+                    <a:bodyPr/>
+                    <a:lstStyle/>
+                    <a:p>
+                      <a:pPr algn="l"/>
+                      <a:r>
+                        <a:rPr sz="800">
+                          <a:solidFill>
+                            <a:srgbClr val="15324A"/>
+                          </a:solidFill>
+                          <a:latin typeface="Calibri"/>
+                        </a:rPr>
+                        <a:t>NCT03680976</a:t>
+                      </a:r>
+                    </a:p>
+                  </a:txBody>
+                  <a:tcPr>
+                    <a:solidFill>
+                      <a:srgbClr val="EDF3F7"/>
+                    </a:solidFill>
+                  </a:tcPr>
+                </a:tc>
+                <a:tc>
+                  <a:txBody>
+                    <a:bodyPr/>
+                    <a:lstStyle/>
+                    <a:p>
+                      <a:pPr algn="l"/>
+                      <a:r>
+                        <a:rPr sz="800">
+                          <a:solidFill>
+                            <a:srgbClr val="15324A"/>
+                          </a:solidFill>
+                          <a:latin typeface="Calibri"/>
+                        </a:rPr>
+                        <a:t>Anti-Inflammatory Lipid Mediators in Asthma</a:t>
+                      </a:r>
+                    </a:p>
+                  </a:txBody>
+                  <a:tcPr>
+                    <a:solidFill>
+                      <a:srgbClr val="EDF3F7"/>
+                    </a:solidFill>
+                  </a:tcPr>
+                </a:tc>
+                <a:tc>
+                  <a:txBody>
+                    <a:bodyPr/>
+                    <a:lstStyle/>
+                    <a:p>
+                      <a:pPr algn="l"/>
+                      <a:r>
+                        <a:rPr sz="800">
+                          <a:solidFill>
+                            <a:srgbClr val="15324A"/>
+                          </a:solidFill>
+                          <a:latin typeface="Calibri"/>
+                        </a:rPr>
+                        <a:t>0.0</a:t>
+                      </a:r>
+                    </a:p>
+                  </a:txBody>
+                  <a:tcPr>
+                    <a:solidFill>
+                      <a:srgbClr val="EDF3F7"/>
+                    </a:solidFill>
+                  </a:tcPr>
+                </a:tc>
+                <a:tc>
+                  <a:txBody>
+                    <a:bodyPr/>
+                    <a:lstStyle/>
+                    <a:p>
+                      <a:pPr algn="l"/>
+                      <a:r>
+                        <a:rPr sz="800">
+                          <a:solidFill>
+                            <a:srgbClr val="15324A"/>
+                          </a:solidFill>
+                          <a:latin typeface="Calibri"/>
+                        </a:rPr>
+                        <a:t>Sally E. Wenzel MD</a:t>
+                      </a:r>
+                    </a:p>
+                  </a:txBody>
+                  <a:tcPr>
+                    <a:solidFill>
+                      <a:srgbClr val="EDF3F7"/>
+                    </a:solidFill>
+                  </a:tcPr>
+                </a:tc>
+              </a:tr>
+              <a:tr h="507076">
+                <a:tc>
+                  <a:txBody>
+                    <a:bodyPr/>
+                    <a:lstStyle/>
+                    <a:p>
+                      <a:pPr algn="l"/>
+                      <a:r>
+                        <a:rPr sz="800">
+                          <a:solidFill>
+                            <a:srgbClr val="15324A"/>
+                          </a:solidFill>
+                          <a:latin typeface="Calibri"/>
+                        </a:rPr>
                         <a:t>Active Context</a:t>
                       </a:r>
                     </a:p>
@@ -5437,7 +6350,7 @@
                           </a:solidFill>
                           <a:latin typeface="Calibri"/>
                         </a:rPr>
-                        <a:t>Recruiting</a:t>
+                        <a:t>Not Yet Recruiting</a:t>
                       </a:r>
                     </a:p>
                   </a:txBody>
@@ -5460,7 +6373,7 @@
                           </a:solidFill>
                           <a:latin typeface="Calibri"/>
                         </a:rPr>
-                        <a:t>NCT06553443</a:t>
+                        <a:t>NCT06618105</a:t>
                       </a:r>
                     </a:p>
                   </a:txBody>
@@ -5483,7 +6396,7 @@
                           </a:solidFill>
                           <a:latin typeface="Calibri"/>
                         </a:rPr>
-                        <a:t>Randomised Clinical Trial Comparing Drug-coated Balloon to Plain Balloon for All</a:t>
+                        <a:t>Bronchoprovocation Study to Demonstrate the Pharmacodynamic Bioequivalence of Al</a:t>
                       </a:r>
                     </a:p>
                   </a:txBody>
@@ -5506,7 +6419,7 @@
                           </a:solidFill>
                           <a:latin typeface="Calibri"/>
                         </a:rPr>
-                        <a:t>94</a:t>
+                        <a:t>144.0</a:t>
                       </a:r>
                     </a:p>
                   </a:txBody>
@@ -5529,7 +6442,7 @@
                           </a:solidFill>
                           <a:latin typeface="Calibri"/>
                         </a:rPr>
-                        <a:t>Singapore General Hospital</a:t>
+                        <a:t>Macleods Pharmaceuticals Ltd</a:t>
                       </a:r>
                     </a:p>
                   </a:txBody>
@@ -5540,7 +6453,7 @@
                   </a:tcPr>
                 </a:tc>
               </a:tr>
-              <a:tr h="619760">
+              <a:tr h="507080">
                 <a:tc>
                   <a:txBody>
                     <a:bodyPr/>
@@ -5577,7 +6490,7 @@
                           </a:solidFill>
                           <a:latin typeface="Calibri"/>
                         </a:rPr>
-                        <a:t>Active Not Recruiting</a:t>
+                        <a:t>Enrolling By Invitation</a:t>
                       </a:r>
                     </a:p>
                   </a:txBody>
@@ -5600,7 +6513,7 @@
                           </a:solidFill>
                           <a:latin typeface="Calibri"/>
                         </a:rPr>
-                        <a:t>NCT04540302</a:t>
+                        <a:t>NCT06820749</a:t>
                       </a:r>
                     </a:p>
                   </a:txBody>
@@ -5623,7 +6536,7 @@
                           </a:solidFill>
                           <a:latin typeface="Calibri"/>
                         </a:rPr>
-                        <a:t>The Merit WRAPSODY AV Access Efficacy Study (WAVE)</a:t>
+                        <a:t>A Study to Evaluate the Efficacy and Safety of HSK31858 Tablets in Patients with</a:t>
                       </a:r>
                     </a:p>
                   </a:txBody>
@@ -5646,7 +6559,7 @@
                           </a:solidFill>
                           <a:latin typeface="Calibri"/>
                         </a:rPr>
-                        <a:t>357</a:t>
+                        <a:t>309.0</a:t>
                       </a:r>
                     </a:p>
                   </a:txBody>
@@ -5669,7 +6582,7 @@
                           </a:solidFill>
                           <a:latin typeface="Calibri"/>
                         </a:rPr>
-                        <a:t>Merit Medical Systems, Inc.</a:t>
+                        <a:t>Haisco Pharmaceutical Group Co., Ltd.</a:t>
                       </a:r>
                     </a:p>
                   </a:txBody>
@@ -5684,6 +6597,1092 @@
           </a:graphicData>
         </a:graphic>
       </p:graphicFrame>
+      <p:sp>
+        <p:nvSpPr>
+          <p:cNvPr id="6" name="TextBox 5"/>
+          <p:cNvSpPr txBox="1"/>
+          <p:nvPr/>
+        </p:nvSpPr>
+        <p:spPr>
+          <a:xfrm>
+            <a:off x="182880" y="6583680"/>
+            <a:ext cx="8229600" cy="228600"/>
+          </a:xfrm>
+          <a:prstGeom prst="rect">
+            <a:avLst/>
+          </a:prstGeom>
+          <a:noFill/>
+        </p:spPr>
+        <p:txBody>
+          <a:bodyPr wrap="square">
+            <a:spAutoFit/>
+          </a:bodyPr>
+          <a:lstStyle/>
+          <a:p>
+            <a:pPr algn="l"/>
+            <a:r>
+              <a:rPr sz="700" b="0">
+                <a:solidFill>
+                  <a:srgbClr val="5F6B7A"/>
+                </a:solidFill>
+                <a:latin typeface="Calibri"/>
+              </a:rPr>
+              <a:t>Trial Design Explorer | Clinical Trial Planning Intelligence | Confidential draft</a:t>
+            </a:r>
+          </a:p>
+        </p:txBody>
+      </p:sp>
+      <p:sp>
+        <p:nvSpPr>
+          <p:cNvPr id="7" name="TextBox 6"/>
+          <p:cNvSpPr txBox="1"/>
+          <p:nvPr/>
+        </p:nvSpPr>
+        <p:spPr>
+          <a:xfrm>
+            <a:off x="11247120" y="6583680"/>
+            <a:ext cx="914400" cy="228600"/>
+          </a:xfrm>
+          <a:prstGeom prst="rect">
+            <a:avLst/>
+          </a:prstGeom>
+          <a:noFill/>
+        </p:spPr>
+        <p:txBody>
+          <a:bodyPr wrap="square">
+            <a:spAutoFit/>
+          </a:bodyPr>
+          <a:lstStyle/>
+          <a:p>
+            <a:pPr algn="r"/>
+            <a:r>
+              <a:rPr sz="700" b="0">
+                <a:solidFill>
+                  <a:srgbClr val="5F6B7A"/>
+                </a:solidFill>
+                <a:latin typeface="Calibri"/>
+              </a:rPr>
+              <a:t>11 / 12</a:t>
+            </a:r>
+          </a:p>
+        </p:txBody>
+      </p:sp>
+    </p:spTree>
+  </p:cSld>
+  <p:clrMapOvr>
+    <a:masterClrMapping/>
+  </p:clrMapOvr>
+</p:sld>
+</file>
+
+<file path=ppt/slides/slide12.xml><?xml version="1.0" encoding="utf-8"?>
+<p:sld xmlns:a="http://schemas.openxmlformats.org/drawingml/2006/main" xmlns:p="http://schemas.openxmlformats.org/presentationml/2006/main" xmlns:r="http://schemas.openxmlformats.org/officeDocument/2006/relationships">
+  <p:cSld>
+    <p:spTree>
+      <p:nvGrpSpPr>
+        <p:cNvPr id="1" name=""/>
+        <p:cNvGrpSpPr/>
+        <p:nvPr/>
+      </p:nvGrpSpPr>
+      <p:grpSpPr/>
+      <p:sp>
+        <p:nvSpPr>
+          <p:cNvPr id="2" name="Rectangle 1"/>
+          <p:cNvSpPr/>
+          <p:nvPr/>
+        </p:nvSpPr>
+        <p:spPr>
+          <a:xfrm>
+            <a:off x="0" y="0"/>
+            <a:ext cx="12188952" cy="822960"/>
+          </a:xfrm>
+          <a:prstGeom prst="rect">
+            <a:avLst/>
+          </a:prstGeom>
+          <a:solidFill>
+            <a:srgbClr val="15324A"/>
+          </a:solidFill>
+          <a:ln>
+            <a:noFill/>
+          </a:ln>
+        </p:spPr>
+        <p:style>
+          <a:lnRef idx="1">
+            <a:schemeClr val="accent1"/>
+          </a:lnRef>
+          <a:fillRef idx="3">
+            <a:schemeClr val="accent1"/>
+          </a:fillRef>
+          <a:effectRef idx="2">
+            <a:schemeClr val="accent1"/>
+          </a:effectRef>
+          <a:fontRef idx="minor">
+            <a:schemeClr val="lt1"/>
+          </a:fontRef>
+        </p:style>
+        <p:txBody>
+          <a:bodyPr rtlCol="0" anchor="ctr"/>
+          <a:lstStyle/>
+          <a:p>
+            <a:pPr algn="ctr"/>
+          </a:p>
+        </p:txBody>
+      </p:sp>
+      <p:sp>
+        <p:nvSpPr>
+          <p:cNvPr id="3" name="TextBox 2"/>
+          <p:cNvSpPr txBox="1"/>
+          <p:nvPr/>
+        </p:nvSpPr>
+        <p:spPr>
+          <a:xfrm>
+            <a:off x="182880" y="73152"/>
+            <a:ext cx="11430000" cy="411480"/>
+          </a:xfrm>
+          <a:prstGeom prst="rect">
+            <a:avLst/>
+          </a:prstGeom>
+          <a:noFill/>
+        </p:spPr>
+        <p:txBody>
+          <a:bodyPr wrap="square">
+            <a:spAutoFit/>
+          </a:bodyPr>
+          <a:lstStyle/>
+          <a:p>
+            <a:pPr algn="l"/>
+            <a:r>
+              <a:rPr sz="2000" b="1">
+                <a:solidFill>
+                  <a:srgbClr val="FFFFFF"/>
+                </a:solidFill>
+                <a:latin typeface="Calibri"/>
+              </a:rPr>
+              <a:t>Audit Trail &amp; Methodology</a:t>
+            </a:r>
+          </a:p>
+        </p:txBody>
+      </p:sp>
+      <p:sp>
+        <p:nvSpPr>
+          <p:cNvPr id="4" name="TextBox 3"/>
+          <p:cNvSpPr txBox="1"/>
+          <p:nvPr/>
+        </p:nvSpPr>
+        <p:spPr>
+          <a:xfrm>
+            <a:off x="182880" y="475488"/>
+            <a:ext cx="11430000" cy="320040"/>
+          </a:xfrm>
+          <a:prstGeom prst="rect">
+            <a:avLst/>
+          </a:prstGeom>
+          <a:noFill/>
+        </p:spPr>
+        <p:txBody>
+          <a:bodyPr wrap="square">
+            <a:spAutoFit/>
+          </a:bodyPr>
+          <a:lstStyle/>
+          <a:p>
+            <a:pPr algn="l"/>
+            <a:r>
+              <a:rPr sz="1000" b="0">
+                <a:solidFill>
+                  <a:srgbClr val="B0C4D8"/>
+                </a:solidFill>
+                <a:latin typeface="Calibri"/>
+              </a:rPr>
+              <a:t>Traceable record of all actions, extractions, comparisons, and exports</a:t>
+            </a:r>
+          </a:p>
+        </p:txBody>
+      </p:sp>
+      <p:sp>
+        <p:nvSpPr>
+          <p:cNvPr id="5" name="TextBox 4"/>
+          <p:cNvSpPr txBox="1"/>
+          <p:nvPr/>
+        </p:nvSpPr>
+        <p:spPr>
+          <a:xfrm>
+            <a:off x="274320" y="914400"/>
+            <a:ext cx="11430000" cy="1097280"/>
+          </a:xfrm>
+          <a:prstGeom prst="rect">
+            <a:avLst/>
+          </a:prstGeom>
+          <a:noFill/>
+        </p:spPr>
+        <p:txBody>
+          <a:bodyPr wrap="square">
+            <a:spAutoFit/>
+          </a:bodyPr>
+          <a:lstStyle/>
+          <a:p>
+            <a:pPr algn="l"/>
+            <a:r>
+              <a:rPr sz="950" b="0">
+                <a:solidFill>
+                  <a:srgbClr val="15324A"/>
+                </a:solidFill>
+                <a:latin typeface="Calibri"/>
+              </a:rPr>
+              <a:t>Source trials retrieved from ClinicalTrials.gov registry (API v2).  Cohort selection uses ten PICO-aligned design dimensions (study type, phase, allocation, masking, intervention model, primary endpoint, intervention type, population, comparator, primary purpose) — sponsor is intentionally excluded.  Protocol fields were extracted from uploaded documents using section-aware LLM chunking across the full document.  All outputs are decision-support intelligence — they do not replace clinical, statistical, operational, or regulatory judgment.</a:t>
+            </a:r>
+          </a:p>
+        </p:txBody>
+      </p:sp>
+      <p:graphicFrame>
+        <p:nvGraphicFramePr>
+          <p:cNvPr id="6" name="Table 5"/>
+          <p:cNvGraphicFramePr>
+            <a:graphicFrameLocks noGrp="1"/>
+          </p:cNvGraphicFramePr>
+          <p:nvPr/>
+        </p:nvGraphicFramePr>
+        <p:xfrm>
+          <a:off x="228600" y="2103120"/>
+          <a:ext cx="11704320" cy="4297680"/>
+        </p:xfrm>
+        <a:graphic>
+          <a:graphicData uri="http://schemas.openxmlformats.org/drawingml/2006/table">
+            <a:tbl>
+              <a:tblPr firstRow="1" bandRow="1">
+                <a:tableStyleId>{5C22544A-7EE6-4342-B048-85BDC9FD1C3A}</a:tableStyleId>
+              </a:tblPr>
+              <a:tblGrid>
+                <a:gridCol w="2926080"/>
+                <a:gridCol w="2926080"/>
+                <a:gridCol w="2926080"/>
+                <a:gridCol w="2926080"/>
+              </a:tblGrid>
+              <a:tr h="537210">
+                <a:tc>
+                  <a:txBody>
+                    <a:bodyPr/>
+                    <a:lstStyle/>
+                    <a:p>
+                      <a:pPr algn="ctr"/>
+                      <a:r>
+                        <a:rPr b="1" sz="750">
+                          <a:solidFill>
+                            <a:srgbClr val="FFFFFF"/>
+                          </a:solidFill>
+                          <a:latin typeface="Calibri"/>
+                        </a:rPr>
+                        <a:t>Timestamp</a:t>
+                      </a:r>
+                    </a:p>
+                  </a:txBody>
+                  <a:tcPr>
+                    <a:solidFill>
+                      <a:srgbClr val="15324A"/>
+                    </a:solidFill>
+                  </a:tcPr>
+                </a:tc>
+                <a:tc>
+                  <a:txBody>
+                    <a:bodyPr/>
+                    <a:lstStyle/>
+                    <a:p>
+                      <a:pPr algn="ctr"/>
+                      <a:r>
+                        <a:rPr b="1" sz="750">
+                          <a:solidFill>
+                            <a:srgbClr val="FFFFFF"/>
+                          </a:solidFill>
+                          <a:latin typeface="Calibri"/>
+                        </a:rPr>
+                        <a:t>Action</a:t>
+                      </a:r>
+                    </a:p>
+                  </a:txBody>
+                  <a:tcPr>
+                    <a:solidFill>
+                      <a:srgbClr val="15324A"/>
+                    </a:solidFill>
+                  </a:tcPr>
+                </a:tc>
+                <a:tc>
+                  <a:txBody>
+                    <a:bodyPr/>
+                    <a:lstStyle/>
+                    <a:p>
+                      <a:pPr algn="ctr"/>
+                      <a:r>
+                        <a:rPr b="1" sz="750">
+                          <a:solidFill>
+                            <a:srgbClr val="FFFFFF"/>
+                          </a:solidFill>
+                          <a:latin typeface="Calibri"/>
+                        </a:rPr>
+                        <a:t>Actor</a:t>
+                      </a:r>
+                    </a:p>
+                  </a:txBody>
+                  <a:tcPr>
+                    <a:solidFill>
+                      <a:srgbClr val="15324A"/>
+                    </a:solidFill>
+                  </a:tcPr>
+                </a:tc>
+                <a:tc>
+                  <a:txBody>
+                    <a:bodyPr/>
+                    <a:lstStyle/>
+                    <a:p>
+                      <a:pPr algn="ctr"/>
+                      <a:r>
+                        <a:rPr b="1" sz="750">
+                          <a:solidFill>
+                            <a:srgbClr val="FFFFFF"/>
+                          </a:solidFill>
+                          <a:latin typeface="Calibri"/>
+                        </a:rPr>
+                        <a:t>Details</a:t>
+                      </a:r>
+                    </a:p>
+                  </a:txBody>
+                  <a:tcPr>
+                    <a:solidFill>
+                      <a:srgbClr val="15324A"/>
+                    </a:solidFill>
+                  </a:tcPr>
+                </a:tc>
+              </a:tr>
+              <a:tr h="537210">
+                <a:tc>
+                  <a:txBody>
+                    <a:bodyPr/>
+                    <a:lstStyle/>
+                    <a:p>
+                      <a:pPr algn="l"/>
+                      <a:r>
+                        <a:rPr sz="750">
+                          <a:solidFill>
+                            <a:srgbClr val="15324A"/>
+                          </a:solidFill>
+                          <a:latin typeface="Calibri"/>
+                        </a:rPr>
+                        <a:t>2026-03-19T17:53:52</a:t>
+                      </a:r>
+                    </a:p>
+                  </a:txBody>
+                  <a:tcPr>
+                    <a:solidFill>
+                      <a:srgbClr val="FFFFFF"/>
+                    </a:solidFill>
+                  </a:tcPr>
+                </a:tc>
+                <a:tc>
+                  <a:txBody>
+                    <a:bodyPr/>
+                    <a:lstStyle/>
+                    <a:p>
+                      <a:pPr algn="l"/>
+                      <a:r>
+                        <a:rPr sz="750">
+                          <a:solidFill>
+                            <a:srgbClr val="15324A"/>
+                          </a:solidFill>
+                          <a:latin typeface="Calibri"/>
+                        </a:rPr>
+                        <a:t>Extract Protocol Profile</a:t>
+                      </a:r>
+                    </a:p>
+                  </a:txBody>
+                  <a:tcPr>
+                    <a:solidFill>
+                      <a:srgbClr val="FFFFFF"/>
+                    </a:solidFill>
+                  </a:tcPr>
+                </a:tc>
+                <a:tc>
+                  <a:txBody>
+                    <a:bodyPr/>
+                    <a:lstStyle/>
+                    <a:p>
+                      <a:pPr algn="l"/>
+                      <a:r>
+                        <a:rPr sz="750">
+                          <a:solidFill>
+                            <a:srgbClr val="15324A"/>
+                          </a:solidFill>
+                          <a:latin typeface="Calibri"/>
+                        </a:rPr>
+                        <a:t>System</a:t>
+                      </a:r>
+                    </a:p>
+                  </a:txBody>
+                  <a:tcPr>
+                    <a:solidFill>
+                      <a:srgbClr val="FFFFFF"/>
+                    </a:solidFill>
+                  </a:tcPr>
+                </a:tc>
+                <a:tc>
+                  <a:txBody>
+                    <a:bodyPr/>
+                    <a:lstStyle/>
+                    <a:p>
+                      <a:pPr algn="l"/>
+                      <a:r>
+                        <a:rPr sz="750">
+                          <a:solidFill>
+                            <a:srgbClr val="15324A"/>
+                          </a:solidFill>
+                          <a:latin typeface="Calibri"/>
+                        </a:rPr>
+                        <a:t>Extracted protocol profile from Prot_002.pdf.</a:t>
+                      </a:r>
+                    </a:p>
+                  </a:txBody>
+                  <a:tcPr>
+                    <a:solidFill>
+                      <a:srgbClr val="FFFFFF"/>
+                    </a:solidFill>
+                  </a:tcPr>
+                </a:tc>
+              </a:tr>
+              <a:tr h="537210">
+                <a:tc>
+                  <a:txBody>
+                    <a:bodyPr/>
+                    <a:lstStyle/>
+                    <a:p>
+                      <a:pPr algn="l"/>
+                      <a:r>
+                        <a:rPr sz="750">
+                          <a:solidFill>
+                            <a:srgbClr val="15324A"/>
+                          </a:solidFill>
+                          <a:latin typeface="Calibri"/>
+                        </a:rPr>
+                        <a:t>2026-03-19T17:54:28</a:t>
+                      </a:r>
+                    </a:p>
+                  </a:txBody>
+                  <a:tcPr>
+                    <a:solidFill>
+                      <a:srgbClr val="EDF3F7"/>
+                    </a:solidFill>
+                  </a:tcPr>
+                </a:tc>
+                <a:tc>
+                  <a:txBody>
+                    <a:bodyPr/>
+                    <a:lstStyle/>
+                    <a:p>
+                      <a:pPr algn="l"/>
+                      <a:r>
+                        <a:rPr sz="750">
+                          <a:solidFill>
+                            <a:srgbClr val="15324A"/>
+                          </a:solidFill>
+                          <a:latin typeface="Calibri"/>
+                        </a:rPr>
+                        <a:t>Review Protocol Profile</a:t>
+                      </a:r>
+                    </a:p>
+                  </a:txBody>
+                  <a:tcPr>
+                    <a:solidFill>
+                      <a:srgbClr val="EDF3F7"/>
+                    </a:solidFill>
+                  </a:tcPr>
+                </a:tc>
+                <a:tc>
+                  <a:txBody>
+                    <a:bodyPr/>
+                    <a:lstStyle/>
+                    <a:p>
+                      <a:pPr algn="l"/>
+                      <a:r>
+                        <a:rPr sz="750">
+                          <a:solidFill>
+                            <a:srgbClr val="15324A"/>
+                          </a:solidFill>
+                          <a:latin typeface="Calibri"/>
+                        </a:rPr>
+                        <a:t>User</a:t>
+                      </a:r>
+                    </a:p>
+                  </a:txBody>
+                  <a:tcPr>
+                    <a:solidFill>
+                      <a:srgbClr val="EDF3F7"/>
+                    </a:solidFill>
+                  </a:tcPr>
+                </a:tc>
+                <a:tc>
+                  <a:txBody>
+                    <a:bodyPr/>
+                    <a:lstStyle/>
+                    <a:p>
+                      <a:pPr algn="l"/>
+                      <a:r>
+                        <a:rPr sz="750">
+                          <a:solidFill>
+                            <a:srgbClr val="15324A"/>
+                          </a:solidFill>
+                          <a:latin typeface="Calibri"/>
+                        </a:rPr>
+                        <a:t>Reviewer confirmed and saved protocol profile fields.</a:t>
+                      </a:r>
+                    </a:p>
+                  </a:txBody>
+                  <a:tcPr>
+                    <a:solidFill>
+                      <a:srgbClr val="EDF3F7"/>
+                    </a:solidFill>
+                  </a:tcPr>
+                </a:tc>
+              </a:tr>
+              <a:tr h="537210">
+                <a:tc>
+                  <a:txBody>
+                    <a:bodyPr/>
+                    <a:lstStyle/>
+                    <a:p>
+                      <a:pPr algn="l"/>
+                      <a:r>
+                        <a:rPr sz="750">
+                          <a:solidFill>
+                            <a:srgbClr val="15324A"/>
+                          </a:solidFill>
+                          <a:latin typeface="Calibri"/>
+                        </a:rPr>
+                        <a:t>2026-03-19T17:54:43</a:t>
+                      </a:r>
+                    </a:p>
+                  </a:txBody>
+                  <a:tcPr>
+                    <a:solidFill>
+                      <a:srgbClr val="FFFFFF"/>
+                    </a:solidFill>
+                  </a:tcPr>
+                </a:tc>
+                <a:tc>
+                  <a:txBody>
+                    <a:bodyPr/>
+                    <a:lstStyle/>
+                    <a:p>
+                      <a:pPr algn="l"/>
+                      <a:r>
+                        <a:rPr sz="750">
+                          <a:solidFill>
+                            <a:srgbClr val="15324A"/>
+                          </a:solidFill>
+                          <a:latin typeface="Calibri"/>
+                        </a:rPr>
+                        <a:t>Build Design Similar Cohort</a:t>
+                      </a:r>
+                    </a:p>
+                  </a:txBody>
+                  <a:tcPr>
+                    <a:solidFill>
+                      <a:srgbClr val="FFFFFF"/>
+                    </a:solidFill>
+                  </a:tcPr>
+                </a:tc>
+                <a:tc>
+                  <a:txBody>
+                    <a:bodyPr/>
+                    <a:lstStyle/>
+                    <a:p>
+                      <a:pPr algn="l"/>
+                      <a:r>
+                        <a:rPr sz="750">
+                          <a:solidFill>
+                            <a:srgbClr val="15324A"/>
+                          </a:solidFill>
+                          <a:latin typeface="Calibri"/>
+                        </a:rPr>
+                        <a:t>System</a:t>
+                      </a:r>
+                    </a:p>
+                  </a:txBody>
+                  <a:tcPr>
+                    <a:solidFill>
+                      <a:srgbClr val="FFFFFF"/>
+                    </a:solidFill>
+                  </a:tcPr>
+                </a:tc>
+                <a:tc>
+                  <a:txBody>
+                    <a:bodyPr/>
+                    <a:lstStyle/>
+                    <a:p>
+                      <a:pPr algn="l"/>
+                      <a:r>
+                        <a:rPr sz="750">
+                          <a:solidFill>
+                            <a:srgbClr val="15324A"/>
+                          </a:solidFill>
+                          <a:latin typeface="Calibri"/>
+                        </a:rPr>
+                        <a:t>Fetched 1000 condition-matched trials for 'Asthma'.  Design similarity filter se</a:t>
+                      </a:r>
+                    </a:p>
+                  </a:txBody>
+                  <a:tcPr>
+                    <a:solidFill>
+                      <a:srgbClr val="FFFFFF"/>
+                    </a:solidFill>
+                  </a:tcPr>
+                </a:tc>
+              </a:tr>
+              <a:tr h="537210">
+                <a:tc>
+                  <a:txBody>
+                    <a:bodyPr/>
+                    <a:lstStyle/>
+                    <a:p>
+                      <a:pPr algn="l"/>
+                      <a:r>
+                        <a:rPr sz="750">
+                          <a:solidFill>
+                            <a:srgbClr val="15324A"/>
+                          </a:solidFill>
+                          <a:latin typeface="Calibri"/>
+                        </a:rPr>
+                        <a:t>2026-03-19T17:56:19</a:t>
+                      </a:r>
+                    </a:p>
+                  </a:txBody>
+                  <a:tcPr>
+                    <a:solidFill>
+                      <a:srgbClr val="EDF3F7"/>
+                    </a:solidFill>
+                  </a:tcPr>
+                </a:tc>
+                <a:tc>
+                  <a:txBody>
+                    <a:bodyPr/>
+                    <a:lstStyle/>
+                    <a:p>
+                      <a:pPr algn="l"/>
+                      <a:r>
+                        <a:rPr sz="750">
+                          <a:solidFill>
+                            <a:srgbClr val="15324A"/>
+                          </a:solidFill>
+                          <a:latin typeface="Calibri"/>
+                        </a:rPr>
+                        <a:t>Export Pdf Report</a:t>
+                      </a:r>
+                    </a:p>
+                  </a:txBody>
+                  <a:tcPr>
+                    <a:solidFill>
+                      <a:srgbClr val="EDF3F7"/>
+                    </a:solidFill>
+                  </a:tcPr>
+                </a:tc>
+                <a:tc>
+                  <a:txBody>
+                    <a:bodyPr/>
+                    <a:lstStyle/>
+                    <a:p>
+                      <a:pPr algn="l"/>
+                      <a:r>
+                        <a:rPr sz="750">
+                          <a:solidFill>
+                            <a:srgbClr val="15324A"/>
+                          </a:solidFill>
+                          <a:latin typeface="Calibri"/>
+                        </a:rPr>
+                        <a:t>System</a:t>
+                      </a:r>
+                    </a:p>
+                  </a:txBody>
+                  <a:tcPr>
+                    <a:solidFill>
+                      <a:srgbClr val="EDF3F7"/>
+                    </a:solidFill>
+                  </a:tcPr>
+                </a:tc>
+                <a:tc>
+                  <a:txBody>
+                    <a:bodyPr/>
+                    <a:lstStyle/>
+                    <a:p>
+                      <a:pPr algn="l"/>
+                      <a:r>
+                        <a:rPr sz="750">
+                          <a:solidFill>
+                            <a:srgbClr val="15324A"/>
+                          </a:solidFill>
+                          <a:latin typeface="Calibri"/>
+                        </a:rPr>
+                        <a:t>Generated trial_protocol_report.pdf.</a:t>
+                      </a:r>
+                    </a:p>
+                  </a:txBody>
+                  <a:tcPr>
+                    <a:solidFill>
+                      <a:srgbClr val="EDF3F7"/>
+                    </a:solidFill>
+                  </a:tcPr>
+                </a:tc>
+              </a:tr>
+              <a:tr h="537210">
+                <a:tc>
+                  <a:txBody>
+                    <a:bodyPr/>
+                    <a:lstStyle/>
+                    <a:p>
+                      <a:pPr algn="l"/>
+                      <a:r>
+                        <a:rPr sz="750">
+                          <a:solidFill>
+                            <a:srgbClr val="15324A"/>
+                          </a:solidFill>
+                          <a:latin typeface="Calibri"/>
+                        </a:rPr>
+                        <a:t>2026-03-19T17:56:46</a:t>
+                      </a:r>
+                    </a:p>
+                  </a:txBody>
+                  <a:tcPr>
+                    <a:solidFill>
+                      <a:srgbClr val="FFFFFF"/>
+                    </a:solidFill>
+                  </a:tcPr>
+                </a:tc>
+                <a:tc>
+                  <a:txBody>
+                    <a:bodyPr/>
+                    <a:lstStyle/>
+                    <a:p>
+                      <a:pPr algn="l"/>
+                      <a:r>
+                        <a:rPr sz="750">
+                          <a:solidFill>
+                            <a:srgbClr val="15324A"/>
+                          </a:solidFill>
+                          <a:latin typeface="Calibri"/>
+                        </a:rPr>
+                        <a:t>Fetch Pubmed Evidence</a:t>
+                      </a:r>
+                    </a:p>
+                  </a:txBody>
+                  <a:tcPr>
+                    <a:solidFill>
+                      <a:srgbClr val="FFFFFF"/>
+                    </a:solidFill>
+                  </a:tcPr>
+                </a:tc>
+                <a:tc>
+                  <a:txBody>
+                    <a:bodyPr/>
+                    <a:lstStyle/>
+                    <a:p>
+                      <a:pPr algn="l"/>
+                      <a:r>
+                        <a:rPr sz="750">
+                          <a:solidFill>
+                            <a:srgbClr val="15324A"/>
+                          </a:solidFill>
+                          <a:latin typeface="Calibri"/>
+                        </a:rPr>
+                        <a:t>System</a:t>
+                      </a:r>
+                    </a:p>
+                  </a:txBody>
+                  <a:tcPr>
+                    <a:solidFill>
+                      <a:srgbClr val="FFFFFF"/>
+                    </a:solidFill>
+                  </a:tcPr>
+                </a:tc>
+                <a:tc>
+                  <a:txBody>
+                    <a:bodyPr/>
+                    <a:lstStyle/>
+                    <a:p>
+                      <a:pPr algn="l"/>
+                      <a:r>
+                        <a:rPr sz="750">
+                          <a:solidFill>
+                            <a:srgbClr val="15324A"/>
+                          </a:solidFill>
+                          <a:latin typeface="Calibri"/>
+                        </a:rPr>
+                        <a:t>Retrieved 8 PubMed articles for 'Asthma'.</a:t>
+                      </a:r>
+                    </a:p>
+                  </a:txBody>
+                  <a:tcPr>
+                    <a:solidFill>
+                      <a:srgbClr val="FFFFFF"/>
+                    </a:solidFill>
+                  </a:tcPr>
+                </a:tc>
+              </a:tr>
+              <a:tr h="537210">
+                <a:tc>
+                  <a:txBody>
+                    <a:bodyPr/>
+                    <a:lstStyle/>
+                    <a:p>
+                      <a:pPr algn="l"/>
+                      <a:r>
+                        <a:rPr sz="750">
+                          <a:solidFill>
+                            <a:srgbClr val="15324A"/>
+                          </a:solidFill>
+                          <a:latin typeface="Calibri"/>
+                        </a:rPr>
+                        <a:t>2026-03-19T17:56:59</a:t>
+                      </a:r>
+                    </a:p>
+                  </a:txBody>
+                  <a:tcPr>
+                    <a:solidFill>
+                      <a:srgbClr val="EDF3F7"/>
+                    </a:solidFill>
+                  </a:tcPr>
+                </a:tc>
+                <a:tc>
+                  <a:txBody>
+                    <a:bodyPr/>
+                    <a:lstStyle/>
+                    <a:p>
+                      <a:pPr algn="l"/>
+                      <a:r>
+                        <a:rPr sz="750">
+                          <a:solidFill>
+                            <a:srgbClr val="15324A"/>
+                          </a:solidFill>
+                          <a:latin typeface="Calibri"/>
+                        </a:rPr>
+                        <a:t>Export Pdf Report</a:t>
+                      </a:r>
+                    </a:p>
+                  </a:txBody>
+                  <a:tcPr>
+                    <a:solidFill>
+                      <a:srgbClr val="EDF3F7"/>
+                    </a:solidFill>
+                  </a:tcPr>
+                </a:tc>
+                <a:tc>
+                  <a:txBody>
+                    <a:bodyPr/>
+                    <a:lstStyle/>
+                    <a:p>
+                      <a:pPr algn="l"/>
+                      <a:r>
+                        <a:rPr sz="750">
+                          <a:solidFill>
+                            <a:srgbClr val="15324A"/>
+                          </a:solidFill>
+                          <a:latin typeface="Calibri"/>
+                        </a:rPr>
+                        <a:t>System</a:t>
+                      </a:r>
+                    </a:p>
+                  </a:txBody>
+                  <a:tcPr>
+                    <a:solidFill>
+                      <a:srgbClr val="EDF3F7"/>
+                    </a:solidFill>
+                  </a:tcPr>
+                </a:tc>
+                <a:tc>
+                  <a:txBody>
+                    <a:bodyPr/>
+                    <a:lstStyle/>
+                    <a:p>
+                      <a:pPr algn="l"/>
+                      <a:r>
+                        <a:rPr sz="750">
+                          <a:solidFill>
+                            <a:srgbClr val="15324A"/>
+                          </a:solidFill>
+                          <a:latin typeface="Calibri"/>
+                        </a:rPr>
+                        <a:t>Generated trial_protocol_report.pdf.</a:t>
+                      </a:r>
+                    </a:p>
+                  </a:txBody>
+                  <a:tcPr>
+                    <a:solidFill>
+                      <a:srgbClr val="EDF3F7"/>
+                    </a:solidFill>
+                  </a:tcPr>
+                </a:tc>
+              </a:tr>
+              <a:tr h="537210">
+                <a:tc>
+                  <a:txBody>
+                    <a:bodyPr/>
+                    <a:lstStyle/>
+                    <a:p>
+                      <a:pPr algn="l"/>
+                      <a:r>
+                        <a:rPr sz="750">
+                          <a:solidFill>
+                            <a:srgbClr val="15324A"/>
+                          </a:solidFill>
+                          <a:latin typeface="Calibri"/>
+                        </a:rPr>
+                        <a:t>2026-03-19T18:05:11</a:t>
+                      </a:r>
+                    </a:p>
+                  </a:txBody>
+                  <a:tcPr>
+                    <a:solidFill>
+                      <a:srgbClr val="FFFFFF"/>
+                    </a:solidFill>
+                  </a:tcPr>
+                </a:tc>
+                <a:tc>
+                  <a:txBody>
+                    <a:bodyPr/>
+                    <a:lstStyle/>
+                    <a:p>
+                      <a:pPr algn="l"/>
+                      <a:r>
+                        <a:rPr sz="750">
+                          <a:solidFill>
+                            <a:srgbClr val="15324A"/>
+                          </a:solidFill>
+                          <a:latin typeface="Calibri"/>
+                        </a:rPr>
+                        <a:t>Export Pptx Slides</a:t>
+                      </a:r>
+                    </a:p>
+                  </a:txBody>
+                  <a:tcPr>
+                    <a:solidFill>
+                      <a:srgbClr val="FFFFFF"/>
+                    </a:solidFill>
+                  </a:tcPr>
+                </a:tc>
+                <a:tc>
+                  <a:txBody>
+                    <a:bodyPr/>
+                    <a:lstStyle/>
+                    <a:p>
+                      <a:pPr algn="l"/>
+                      <a:r>
+                        <a:rPr sz="750">
+                          <a:solidFill>
+                            <a:srgbClr val="15324A"/>
+                          </a:solidFill>
+                          <a:latin typeface="Calibri"/>
+                        </a:rPr>
+                        <a:t>System</a:t>
+                      </a:r>
+                    </a:p>
+                  </a:txBody>
+                  <a:tcPr>
+                    <a:solidFill>
+                      <a:srgbClr val="FFFFFF"/>
+                    </a:solidFill>
+                  </a:tcPr>
+                </a:tc>
+                <a:tc>
+                  <a:txBody>
+                    <a:bodyPr/>
+                    <a:lstStyle/>
+                    <a:p>
+                      <a:pPr algn="l"/>
+                      <a:r>
+                        <a:rPr sz="750">
+                          <a:solidFill>
+                            <a:srgbClr val="15324A"/>
+                          </a:solidFill>
+                          <a:latin typeface="Calibri"/>
+                        </a:rPr>
+                        <a:t>Generated trial_protocol_slides.pptx.</a:t>
+                      </a:r>
+                    </a:p>
+                  </a:txBody>
+                  <a:tcPr>
+                    <a:solidFill>
+                      <a:srgbClr val="FFFFFF"/>
+                    </a:solidFill>
+                  </a:tcPr>
+                </a:tc>
+              </a:tr>
+            </a:tbl>
+          </a:graphicData>
+        </a:graphic>
+      </p:graphicFrame>
+      <p:sp>
+        <p:nvSpPr>
+          <p:cNvPr id="7" name="TextBox 6"/>
+          <p:cNvSpPr txBox="1"/>
+          <p:nvPr/>
+        </p:nvSpPr>
+        <p:spPr>
+          <a:xfrm>
+            <a:off x="182880" y="6583680"/>
+            <a:ext cx="8229600" cy="228600"/>
+          </a:xfrm>
+          <a:prstGeom prst="rect">
+            <a:avLst/>
+          </a:prstGeom>
+          <a:noFill/>
+        </p:spPr>
+        <p:txBody>
+          <a:bodyPr wrap="square">
+            <a:spAutoFit/>
+          </a:bodyPr>
+          <a:lstStyle/>
+          <a:p>
+            <a:pPr algn="l"/>
+            <a:r>
+              <a:rPr sz="700" b="0">
+                <a:solidFill>
+                  <a:srgbClr val="5F6B7A"/>
+                </a:solidFill>
+                <a:latin typeface="Calibri"/>
+              </a:rPr>
+              <a:t>Trial Design Explorer | Clinical Trial Planning Intelligence | Confidential draft</a:t>
+            </a:r>
+          </a:p>
+        </p:txBody>
+      </p:sp>
+      <p:sp>
+        <p:nvSpPr>
+          <p:cNvPr id="8" name="TextBox 7"/>
+          <p:cNvSpPr txBox="1"/>
+          <p:nvPr/>
+        </p:nvSpPr>
+        <p:spPr>
+          <a:xfrm>
+            <a:off x="11247120" y="6583680"/>
+            <a:ext cx="914400" cy="228600"/>
+          </a:xfrm>
+          <a:prstGeom prst="rect">
+            <a:avLst/>
+          </a:prstGeom>
+          <a:noFill/>
+        </p:spPr>
+        <p:txBody>
+          <a:bodyPr wrap="square">
+            <a:spAutoFit/>
+          </a:bodyPr>
+          <a:lstStyle/>
+          <a:p>
+            <a:pPr algn="r"/>
+            <a:r>
+              <a:rPr sz="700" b="0">
+                <a:solidFill>
+                  <a:srgbClr val="5F6B7A"/>
+                </a:solidFill>
+                <a:latin typeface="Calibri"/>
+              </a:rPr>
+              <a:t>12 / 12</a:t>
+            </a:r>
+          </a:p>
+        </p:txBody>
+      </p:sp>
     </p:spTree>
   </p:cSld>
   <p:clrMapOvr>
@@ -5817,77 +7816,7 @@
       </p:sp>
       <p:sp>
         <p:nvSpPr>
-          <p:cNvPr id="5" name="TextBox 4"/>
-          <p:cNvSpPr txBox="1"/>
-          <p:nvPr/>
-        </p:nvSpPr>
-        <p:spPr>
-          <a:xfrm>
-            <a:off x="182880" y="6583680"/>
-            <a:ext cx="8229600" cy="228600"/>
-          </a:xfrm>
-          <a:prstGeom prst="rect">
-            <a:avLst/>
-          </a:prstGeom>
-          <a:noFill/>
-        </p:spPr>
-        <p:txBody>
-          <a:bodyPr wrap="square">
-            <a:spAutoFit/>
-          </a:bodyPr>
-          <a:lstStyle/>
-          <a:p>
-            <a:pPr algn="l"/>
-            <a:r>
-              <a:rPr sz="700" b="0">
-                <a:solidFill>
-                  <a:srgbClr val="5F6B7A"/>
-                </a:solidFill>
-                <a:latin typeface="Calibri"/>
-              </a:rPr>
-              <a:t>Trial Design Explorer | Clinical Trial Planning Intelligence | Confidential draft</a:t>
-            </a:r>
-          </a:p>
-        </p:txBody>
-      </p:sp>
-      <p:sp>
-        <p:nvSpPr>
-          <p:cNvPr id="6" name="TextBox 5"/>
-          <p:cNvSpPr txBox="1"/>
-          <p:nvPr/>
-        </p:nvSpPr>
-        <p:spPr>
-          <a:xfrm>
-            <a:off x="11247120" y="6583680"/>
-            <a:ext cx="914400" cy="228600"/>
-          </a:xfrm>
-          <a:prstGeom prst="rect">
-            <a:avLst/>
-          </a:prstGeom>
-          <a:noFill/>
-        </p:spPr>
-        <p:txBody>
-          <a:bodyPr wrap="square">
-            <a:spAutoFit/>
-          </a:bodyPr>
-          <a:lstStyle/>
-          <a:p>
-            <a:pPr algn="r"/>
-            <a:r>
-              <a:rPr sz="700" b="0">
-                <a:solidFill>
-                  <a:srgbClr val="5F6B7A"/>
-                </a:solidFill>
-                <a:latin typeface="Calibri"/>
-              </a:rPr>
-              <a:t>2 / 11</a:t>
-            </a:r>
-          </a:p>
-        </p:txBody>
-      </p:sp>
-      <p:sp>
-        <p:nvSpPr>
-          <p:cNvPr id="7" name="Rectangle 6"/>
+          <p:cNvPr id="5" name="Rectangle 4"/>
           <p:cNvSpPr/>
           <p:nvPr/>
         </p:nvSpPr>
@@ -5930,7 +7859,7 @@
       </p:sp>
       <p:sp>
         <p:nvSpPr>
-          <p:cNvPr id="8" name="TextBox 7"/>
+          <p:cNvPr id="6" name="TextBox 5"/>
           <p:cNvSpPr txBox="1"/>
           <p:nvPr/>
         </p:nvSpPr>
@@ -5965,7 +7894,7 @@
       </p:sp>
       <p:sp>
         <p:nvSpPr>
-          <p:cNvPr id="9" name="TextBox 8"/>
+          <p:cNvPr id="7" name="TextBox 6"/>
           <p:cNvSpPr txBox="1"/>
           <p:nvPr/>
         </p:nvSpPr>
@@ -5993,14 +7922,14 @@
                 </a:solidFill>
                 <a:latin typeface="Calibri"/>
               </a:rPr>
-              <a:t>19</a:t>
-            </a:r>
-          </a:p>
-        </p:txBody>
-      </p:sp>
-      <p:sp>
-        <p:nvSpPr>
-          <p:cNvPr id="10" name="Rectangle 9"/>
+              <a:t>972</a:t>
+            </a:r>
+          </a:p>
+        </p:txBody>
+      </p:sp>
+      <p:sp>
+        <p:nvSpPr>
+          <p:cNvPr id="8" name="Rectangle 7"/>
           <p:cNvSpPr/>
           <p:nvPr/>
         </p:nvSpPr>
@@ -6043,7 +7972,7 @@
       </p:sp>
       <p:sp>
         <p:nvSpPr>
-          <p:cNvPr id="11" name="TextBox 10"/>
+          <p:cNvPr id="9" name="TextBox 8"/>
           <p:cNvSpPr txBox="1"/>
           <p:nvPr/>
         </p:nvSpPr>
@@ -6078,7 +8007,7 @@
       </p:sp>
       <p:sp>
         <p:nvSpPr>
-          <p:cNvPr id="12" name="TextBox 11"/>
+          <p:cNvPr id="10" name="TextBox 9"/>
           <p:cNvSpPr txBox="1"/>
           <p:nvPr/>
         </p:nvSpPr>
@@ -6106,14 +8035,14 @@
                 </a:solidFill>
                 <a:latin typeface="Calibri"/>
               </a:rPr>
-              <a:t>38.6%</a:t>
-            </a:r>
-          </a:p>
-        </p:txBody>
-      </p:sp>
-      <p:sp>
-        <p:nvSpPr>
-          <p:cNvPr id="13" name="Rectangle 12"/>
+              <a:t>39.4%</a:t>
+            </a:r>
+          </a:p>
+        </p:txBody>
+      </p:sp>
+      <p:sp>
+        <p:nvSpPr>
+          <p:cNvPr id="11" name="Rectangle 10"/>
           <p:cNvSpPr/>
           <p:nvPr/>
         </p:nvSpPr>
@@ -6156,7 +8085,7 @@
       </p:sp>
       <p:sp>
         <p:nvSpPr>
-          <p:cNvPr id="14" name="TextBox 13"/>
+          <p:cNvPr id="12" name="TextBox 11"/>
           <p:cNvSpPr txBox="1"/>
           <p:nvPr/>
         </p:nvSpPr>
@@ -6191,7 +8120,7 @@
       </p:sp>
       <p:sp>
         <p:nvSpPr>
-          <p:cNvPr id="15" name="TextBox 14"/>
+          <p:cNvPr id="13" name="TextBox 12"/>
           <p:cNvSpPr txBox="1"/>
           <p:nvPr/>
         </p:nvSpPr>
@@ -6219,14 +8148,14 @@
                 </a:solidFill>
                 <a:latin typeface="Calibri"/>
               </a:rPr>
-              <a:t>64.3%</a:t>
-            </a:r>
-          </a:p>
-        </p:txBody>
-      </p:sp>
-      <p:sp>
-        <p:nvSpPr>
-          <p:cNvPr id="16" name="Rectangle 15"/>
+              <a:t>41.4%</a:t>
+            </a:r>
+          </a:p>
+        </p:txBody>
+      </p:sp>
+      <p:sp>
+        <p:nvSpPr>
+          <p:cNvPr id="14" name="Rectangle 13"/>
           <p:cNvSpPr/>
           <p:nvPr/>
         </p:nvSpPr>
@@ -6269,7 +8198,7 @@
       </p:sp>
       <p:sp>
         <p:nvSpPr>
-          <p:cNvPr id="17" name="TextBox 16"/>
+          <p:cNvPr id="15" name="TextBox 14"/>
           <p:cNvSpPr txBox="1"/>
           <p:nvPr/>
         </p:nvSpPr>
@@ -6304,7 +8233,7 @@
       </p:sp>
       <p:sp>
         <p:nvSpPr>
-          <p:cNvPr id="18" name="TextBox 17"/>
+          <p:cNvPr id="16" name="TextBox 15"/>
           <p:cNvSpPr txBox="1"/>
           <p:nvPr/>
         </p:nvSpPr>
@@ -6332,14 +8261,14 @@
                 </a:solidFill>
                 <a:latin typeface="Calibri"/>
               </a:rPr>
-              <a:t>Limited</a:t>
-            </a:r>
-          </a:p>
-        </p:txBody>
-      </p:sp>
-      <p:sp>
-        <p:nvSpPr>
-          <p:cNvPr id="19" name="TextBox 18"/>
+              <a:t>Strong</a:t>
+            </a:r>
+          </a:p>
+        </p:txBody>
+      </p:sp>
+      <p:sp>
+        <p:nvSpPr>
+          <p:cNvPr id="17" name="TextBox 16"/>
           <p:cNvSpPr txBox="1"/>
           <p:nvPr/>
         </p:nvSpPr>
@@ -6367,14 +8296,14 @@
                 </a:solidFill>
                 <a:latin typeface="Calibri"/>
               </a:rPr>
-              <a:t>Overall posture: Closer to disrupted precedent</a:t>
-            </a:r>
-          </a:p>
-        </p:txBody>
-      </p:sp>
-      <p:sp>
-        <p:nvSpPr>
-          <p:cNvPr id="20" name="Rectangle 19"/>
+              <a:t>Overall posture: Mixed precedent posture</a:t>
+            </a:r>
+          </a:p>
+        </p:txBody>
+      </p:sp>
+      <p:sp>
+        <p:nvSpPr>
+          <p:cNvPr id="18" name="Rectangle 17"/>
           <p:cNvSpPr/>
           <p:nvPr/>
         </p:nvSpPr>
@@ -6417,7 +8346,7 @@
       </p:sp>
       <p:sp>
         <p:nvSpPr>
-          <p:cNvPr id="21" name="TextBox 20"/>
+          <p:cNvPr id="19" name="TextBox 18"/>
           <p:cNvSpPr txBox="1"/>
           <p:nvPr/>
         </p:nvSpPr>
@@ -6445,14 +8374,14 @@
                 </a:solidFill>
                 <a:latin typeface="Calibri"/>
               </a:rPr>
-              <a:t>Protocol: Randomised clinical trial comparing drug-coated balloon to plain balloon for all peripheral AVF stenosis</a:t>
-            </a:r>
-          </a:p>
-        </p:txBody>
-      </p:sp>
-      <p:sp>
-        <p:nvSpPr>
-          <p:cNvPr id="22" name="Rectangle 21"/>
+              <a:t>Protocol: A Randomized, Double -blind, Single Dose, 2 -way Crossover Study to Assess Bronchospasm Potentially Induced by the Hydrofluoroolefin (HFO) Metered Dose Inhaler (MDI) Propellant as Compared with the Hydrofluoroalkane (HFA) MDI Propellant in Participants with Asthma, Well Controlled or Partially Controlled on Short -acting beta 2-agonists (SABA) with or without Low -Dose Inhaled Corticosteroids (ICS)</a:t>
+            </a:r>
+          </a:p>
+        </p:txBody>
+      </p:sp>
+      <p:sp>
+        <p:nvSpPr>
+          <p:cNvPr id="20" name="Rectangle 19"/>
           <p:cNvSpPr/>
           <p:nvPr/>
         </p:nvSpPr>
@@ -6495,7 +8424,7 @@
       </p:sp>
       <p:sp>
         <p:nvSpPr>
-          <p:cNvPr id="23" name="TextBox 22"/>
+          <p:cNvPr id="21" name="TextBox 20"/>
           <p:cNvSpPr txBox="1"/>
           <p:nvPr/>
         </p:nvSpPr>
@@ -6523,14 +8452,14 @@
                 </a:solidFill>
                 <a:latin typeface="Calibri"/>
               </a:rPr>
-              <a:t>Clinical focus: Peripheral AVF stenosis</a:t>
-            </a:r>
-          </a:p>
-        </p:txBody>
-      </p:sp>
-      <p:sp>
-        <p:nvSpPr>
-          <p:cNvPr id="24" name="Rectangle 23"/>
+              <a:t>Clinical focus: Asthma</a:t>
+            </a:r>
+          </a:p>
+        </p:txBody>
+      </p:sp>
+      <p:sp>
+        <p:nvSpPr>
+          <p:cNvPr id="22" name="Rectangle 21"/>
           <p:cNvSpPr/>
           <p:nvPr/>
         </p:nvSpPr>
@@ -6573,7 +8502,7 @@
       </p:sp>
       <p:sp>
         <p:nvSpPr>
-          <p:cNvPr id="25" name="TextBox 24"/>
+          <p:cNvPr id="23" name="TextBox 22"/>
           <p:cNvSpPr txBox="1"/>
           <p:nvPr/>
         </p:nvSpPr>
@@ -6601,14 +8530,14 @@
                 </a:solidFill>
                 <a:latin typeface="Calibri"/>
               </a:rPr>
-              <a:t>Design fit vs completed precedent: 38.6%  |  vs disrupted: 64.3%</a:t>
-            </a:r>
-          </a:p>
-        </p:txBody>
-      </p:sp>
-      <p:sp>
-        <p:nvSpPr>
-          <p:cNvPr id="26" name="Rectangle 25"/>
+              <a:t>Design fit vs completed precedent: 39.4%  |  vs disrupted: 41.4%</a:t>
+            </a:r>
+          </a:p>
+        </p:txBody>
+      </p:sp>
+      <p:sp>
+        <p:nvSpPr>
+          <p:cNvPr id="24" name="Rectangle 23"/>
           <p:cNvSpPr/>
           <p:nvPr/>
         </p:nvSpPr>
@@ -6651,7 +8580,7 @@
       </p:sp>
       <p:sp>
         <p:nvSpPr>
-          <p:cNvPr id="27" name="TextBox 26"/>
+          <p:cNvPr id="25" name="TextBox 24"/>
           <p:cNvSpPr txBox="1"/>
           <p:nvPr/>
         </p:nvSpPr>
@@ -6679,64 +8608,21 @@
                 </a:solidFill>
                 <a:latin typeface="Calibri"/>
               </a:rPr>
-              <a:t>[High] Revisit the allocation strategy or document why the current choice remains defensible.</a:t>
-            </a:r>
-          </a:p>
-        </p:txBody>
-      </p:sp>
-      <p:sp>
-        <p:nvSpPr>
-          <p:cNvPr id="28" name="Rectangle 27"/>
-          <p:cNvSpPr/>
-          <p:nvPr/>
-        </p:nvSpPr>
-        <p:spPr>
-          <a:xfrm>
-            <a:off x="274320" y="3858768"/>
-            <a:ext cx="54864" cy="201168"/>
-          </a:xfrm>
-          <a:prstGeom prst="rect">
-            <a:avLst/>
-          </a:prstGeom>
-          <a:solidFill>
-            <a:srgbClr val="1F5B7A"/>
-          </a:solidFill>
-          <a:ln>
-            <a:noFill/>
-          </a:ln>
-        </p:spPr>
-        <p:style>
-          <a:lnRef idx="1">
-            <a:schemeClr val="accent1"/>
-          </a:lnRef>
-          <a:fillRef idx="3">
-            <a:schemeClr val="accent1"/>
-          </a:fillRef>
-          <a:effectRef idx="2">
-            <a:schemeClr val="accent1"/>
-          </a:effectRef>
-          <a:fontRef idx="minor">
-            <a:schemeClr val="lt1"/>
-          </a:fontRef>
-        </p:style>
-        <p:txBody>
-          <a:bodyPr rtlCol="0" anchor="ctr"/>
-          <a:lstStyle/>
-          <a:p>
-            <a:pPr algn="ctr"/>
-          </a:p>
-        </p:txBody>
-      </p:sp>
-      <p:sp>
-        <p:nvSpPr>
-          <p:cNvPr id="29" name="TextBox 28"/>
+              <a:t>[Monitor] No strong design outlier was detected in the current benchmark snapshot.</a:t>
+            </a:r>
+          </a:p>
+        </p:txBody>
+      </p:sp>
+      <p:sp>
+        <p:nvSpPr>
+          <p:cNvPr id="26" name="TextBox 25"/>
           <p:cNvSpPr txBox="1"/>
           <p:nvPr/>
         </p:nvSpPr>
         <p:spPr>
           <a:xfrm>
-            <a:off x="457200" y="3840480"/>
-            <a:ext cx="11155680" cy="292608"/>
+            <a:off x="182880" y="6583680"/>
+            <a:ext cx="8229600" cy="228600"/>
           </a:xfrm>
           <a:prstGeom prst="rect">
             <a:avLst/>
@@ -6751,70 +8637,27 @@
           <a:p>
             <a:pPr algn="l"/>
             <a:r>
-              <a:rPr sz="1000" b="0">
+              <a:rPr sz="700" b="0">
                 <a:solidFill>
-                  <a:srgbClr val="15324A"/>
+                  <a:srgbClr val="5F6B7A"/>
                 </a:solidFill>
                 <a:latin typeface="Calibri"/>
               </a:rPr>
-              <a:t>[High] Reassess the masking plan and explicitly document any trade-off between feasibility and evidence credibility.</a:t>
-            </a:r>
-          </a:p>
-        </p:txBody>
-      </p:sp>
-      <p:sp>
-        <p:nvSpPr>
-          <p:cNvPr id="30" name="Rectangle 29"/>
-          <p:cNvSpPr/>
-          <p:nvPr/>
-        </p:nvSpPr>
-        <p:spPr>
-          <a:xfrm>
-            <a:off x="274320" y="4206240"/>
-            <a:ext cx="54864" cy="201168"/>
-          </a:xfrm>
-          <a:prstGeom prst="rect">
-            <a:avLst/>
-          </a:prstGeom>
-          <a:solidFill>
-            <a:srgbClr val="1F5B7A"/>
-          </a:solidFill>
-          <a:ln>
-            <a:noFill/>
-          </a:ln>
-        </p:spPr>
-        <p:style>
-          <a:lnRef idx="1">
-            <a:schemeClr val="accent1"/>
-          </a:lnRef>
-          <a:fillRef idx="3">
-            <a:schemeClr val="accent1"/>
-          </a:fillRef>
-          <a:effectRef idx="2">
-            <a:schemeClr val="accent1"/>
-          </a:effectRef>
-          <a:fontRef idx="minor">
-            <a:schemeClr val="lt1"/>
-          </a:fontRef>
-        </p:style>
-        <p:txBody>
-          <a:bodyPr rtlCol="0" anchor="ctr"/>
-          <a:lstStyle/>
-          <a:p>
-            <a:pPr algn="ctr"/>
-          </a:p>
-        </p:txBody>
-      </p:sp>
-      <p:sp>
-        <p:nvSpPr>
-          <p:cNvPr id="31" name="TextBox 30"/>
+              <a:t>Trial Design Explorer | Clinical Trial Planning Intelligence | Confidential draft</a:t>
+            </a:r>
+          </a:p>
+        </p:txBody>
+      </p:sp>
+      <p:sp>
+        <p:nvSpPr>
+          <p:cNvPr id="27" name="TextBox 26"/>
           <p:cNvSpPr txBox="1"/>
           <p:nvPr/>
         </p:nvSpPr>
         <p:spPr>
           <a:xfrm>
-            <a:off x="457200" y="4187952"/>
-            <a:ext cx="11155680" cy="292608"/>
+            <a:off x="11247120" y="6583680"/>
+            <a:ext cx="914400" cy="228600"/>
           </a:xfrm>
           <a:prstGeom prst="rect">
             <a:avLst/>
@@ -6827,15 +8670,15 @@
           </a:bodyPr>
           <a:lstStyle/>
           <a:p>
-            <a:pPr algn="l"/>
-            <a:r>
-              <a:rPr sz="1000" b="0">
+            <a:pPr algn="r"/>
+            <a:r>
+              <a:rPr sz="700" b="0">
                 <a:solidFill>
-                  <a:srgbClr val="15324A"/>
+                  <a:srgbClr val="5F6B7A"/>
                 </a:solidFill>
                 <a:latin typeface="Calibri"/>
               </a:rPr>
-              <a:t>[High] Rework the draft so it aligns more closely with completed-trial precedent before sign-off.</a:t>
+              <a:t>2 / 12</a:t>
             </a:r>
           </a:p>
         </p:txBody>
@@ -6971,79 +8814,9 @@
           </a:p>
         </p:txBody>
       </p:sp>
-      <p:sp>
-        <p:nvSpPr>
-          <p:cNvPr id="5" name="TextBox 4"/>
-          <p:cNvSpPr txBox="1"/>
-          <p:nvPr/>
-        </p:nvSpPr>
-        <p:spPr>
-          <a:xfrm>
-            <a:off x="182880" y="6583680"/>
-            <a:ext cx="8229600" cy="228600"/>
-          </a:xfrm>
-          <a:prstGeom prst="rect">
-            <a:avLst/>
-          </a:prstGeom>
-          <a:noFill/>
-        </p:spPr>
-        <p:txBody>
-          <a:bodyPr wrap="square">
-            <a:spAutoFit/>
-          </a:bodyPr>
-          <a:lstStyle/>
-          <a:p>
-            <a:pPr algn="l"/>
-            <a:r>
-              <a:rPr sz="700" b="0">
-                <a:solidFill>
-                  <a:srgbClr val="5F6B7A"/>
-                </a:solidFill>
-                <a:latin typeface="Calibri"/>
-              </a:rPr>
-              <a:t>Trial Design Explorer | Clinical Trial Planning Intelligence | Confidential draft</a:t>
-            </a:r>
-          </a:p>
-        </p:txBody>
-      </p:sp>
-      <p:sp>
-        <p:nvSpPr>
-          <p:cNvPr id="6" name="TextBox 5"/>
-          <p:cNvSpPr txBox="1"/>
-          <p:nvPr/>
-        </p:nvSpPr>
-        <p:spPr>
-          <a:xfrm>
-            <a:off x="11247120" y="6583680"/>
-            <a:ext cx="914400" cy="228600"/>
-          </a:xfrm>
-          <a:prstGeom prst="rect">
-            <a:avLst/>
-          </a:prstGeom>
-          <a:noFill/>
-        </p:spPr>
-        <p:txBody>
-          <a:bodyPr wrap="square">
-            <a:spAutoFit/>
-          </a:bodyPr>
-          <a:lstStyle/>
-          <a:p>
-            <a:pPr algn="r"/>
-            <a:r>
-              <a:rPr sz="700" b="0">
-                <a:solidFill>
-                  <a:srgbClr val="5F6B7A"/>
-                </a:solidFill>
-                <a:latin typeface="Calibri"/>
-              </a:rPr>
-              <a:t>3 / 11</a:t>
-            </a:r>
-          </a:p>
-        </p:txBody>
-      </p:sp>
       <p:pic>
         <p:nvPicPr>
-          <p:cNvPr id="7" name="Picture 6" descr="image.png"/>
+          <p:cNvPr id="5" name="Picture 4" descr="image.png"/>
           <p:cNvPicPr>
             <a:picLocks noChangeAspect="1"/>
           </p:cNvPicPr>
@@ -7067,7 +8840,7 @@
       </p:pic>
       <p:sp>
         <p:nvSpPr>
-          <p:cNvPr id="8" name="Rectangle 7"/>
+          <p:cNvPr id="6" name="Rectangle 5"/>
           <p:cNvSpPr/>
           <p:nvPr/>
         </p:nvSpPr>
@@ -7110,7 +8883,7 @@
       </p:sp>
       <p:sp>
         <p:nvSpPr>
-          <p:cNvPr id="9" name="TextBox 8"/>
+          <p:cNvPr id="7" name="TextBox 6"/>
           <p:cNvSpPr txBox="1"/>
           <p:nvPr/>
         </p:nvSpPr>
@@ -7138,14 +8911,14 @@
                 </a:solidFill>
                 <a:latin typeface="Calibri"/>
               </a:rPr>
-              <a:t>38.6%</a:t>
-            </a:r>
-          </a:p>
-        </p:txBody>
-      </p:sp>
-      <p:sp>
-        <p:nvSpPr>
-          <p:cNvPr id="10" name="TextBox 9"/>
+              <a:t>39.4%</a:t>
+            </a:r>
+          </a:p>
+        </p:txBody>
+      </p:sp>
+      <p:sp>
+        <p:nvSpPr>
+          <p:cNvPr id="8" name="TextBox 7"/>
           <p:cNvSpPr txBox="1"/>
           <p:nvPr/>
         </p:nvSpPr>
@@ -7180,7 +8953,7 @@
       </p:sp>
       <p:sp>
         <p:nvSpPr>
-          <p:cNvPr id="11" name="Rectangle 10"/>
+          <p:cNvPr id="9" name="Rectangle 8"/>
           <p:cNvSpPr/>
           <p:nvPr/>
         </p:nvSpPr>
@@ -7223,7 +8996,7 @@
       </p:sp>
       <p:sp>
         <p:nvSpPr>
-          <p:cNvPr id="12" name="TextBox 11"/>
+          <p:cNvPr id="10" name="TextBox 9"/>
           <p:cNvSpPr txBox="1"/>
           <p:nvPr/>
         </p:nvSpPr>
@@ -7251,14 +9024,14 @@
                 </a:solidFill>
                 <a:latin typeface="Calibri"/>
               </a:rPr>
-              <a:t>64.3%</a:t>
-            </a:r>
-          </a:p>
-        </p:txBody>
-      </p:sp>
-      <p:sp>
-        <p:nvSpPr>
-          <p:cNvPr id="13" name="TextBox 12"/>
+              <a:t>41.4%</a:t>
+            </a:r>
+          </a:p>
+        </p:txBody>
+      </p:sp>
+      <p:sp>
+        <p:nvSpPr>
+          <p:cNvPr id="11" name="TextBox 10"/>
           <p:cNvSpPr txBox="1"/>
           <p:nvPr/>
         </p:nvSpPr>
@@ -7293,7 +9066,7 @@
       </p:sp>
       <p:sp>
         <p:nvSpPr>
-          <p:cNvPr id="14" name="Rectangle 13"/>
+          <p:cNvPr id="12" name="Rectangle 11"/>
           <p:cNvSpPr/>
           <p:nvPr/>
         </p:nvSpPr>
@@ -7336,7 +9109,7 @@
       </p:sp>
       <p:sp>
         <p:nvSpPr>
-          <p:cNvPr id="15" name="TextBox 14"/>
+          <p:cNvPr id="13" name="TextBox 12"/>
           <p:cNvSpPr txBox="1"/>
           <p:nvPr/>
         </p:nvSpPr>
@@ -7364,14 +9137,14 @@
                 </a:solidFill>
                 <a:latin typeface="Calibri"/>
               </a:rPr>
-              <a:t>-25.7%</a:t>
-            </a:r>
-          </a:p>
-        </p:txBody>
-      </p:sp>
-      <p:sp>
-        <p:nvSpPr>
-          <p:cNvPr id="16" name="TextBox 15"/>
+              <a:t>-2.0%</a:t>
+            </a:r>
+          </a:p>
+        </p:txBody>
+      </p:sp>
+      <p:sp>
+        <p:nvSpPr>
+          <p:cNvPr id="14" name="TextBox 13"/>
           <p:cNvSpPr txBox="1"/>
           <p:nvPr/>
         </p:nvSpPr>
@@ -7406,7 +9179,7 @@
       </p:sp>
       <p:sp>
         <p:nvSpPr>
-          <p:cNvPr id="17" name="Rectangle 16"/>
+          <p:cNvPr id="15" name="Rectangle 14"/>
           <p:cNvSpPr/>
           <p:nvPr/>
         </p:nvSpPr>
@@ -7449,7 +9222,7 @@
       </p:sp>
       <p:sp>
         <p:nvSpPr>
-          <p:cNvPr id="18" name="TextBox 17"/>
+          <p:cNvPr id="16" name="TextBox 15"/>
           <p:cNvSpPr txBox="1"/>
           <p:nvPr/>
         </p:nvSpPr>
@@ -7477,14 +9250,14 @@
                 </a:solidFill>
                 <a:latin typeface="Calibri"/>
               </a:rPr>
-              <a:t>Limited</a:t>
-            </a:r>
-          </a:p>
-        </p:txBody>
-      </p:sp>
-      <p:sp>
-        <p:nvSpPr>
-          <p:cNvPr id="19" name="TextBox 18"/>
+              <a:t>Strong</a:t>
+            </a:r>
+          </a:p>
+        </p:txBody>
+      </p:sp>
+      <p:sp>
+        <p:nvSpPr>
+          <p:cNvPr id="17" name="TextBox 16"/>
           <p:cNvSpPr txBox="1"/>
           <p:nvPr/>
         </p:nvSpPr>
@@ -7519,7 +9292,7 @@
       </p:sp>
       <p:sp>
         <p:nvSpPr>
-          <p:cNvPr id="20" name="Rectangle 19"/>
+          <p:cNvPr id="18" name="Rectangle 17"/>
           <p:cNvSpPr/>
           <p:nvPr/>
         </p:nvSpPr>
@@ -7562,7 +9335,7 @@
       </p:sp>
       <p:sp>
         <p:nvSpPr>
-          <p:cNvPr id="21" name="TextBox 20"/>
+          <p:cNvPr id="19" name="TextBox 18"/>
           <p:cNvSpPr txBox="1"/>
           <p:nvPr/>
         </p:nvSpPr>
@@ -7590,14 +9363,14 @@
                 </a:solidFill>
                 <a:latin typeface="Calibri"/>
               </a:rPr>
-              <a:t>10</a:t>
-            </a:r>
-          </a:p>
-        </p:txBody>
-      </p:sp>
-      <p:sp>
-        <p:nvSpPr>
-          <p:cNvPr id="22" name="TextBox 21"/>
+              <a:t>626</a:t>
+            </a:r>
+          </a:p>
+        </p:txBody>
+      </p:sp>
+      <p:sp>
+        <p:nvSpPr>
+          <p:cNvPr id="20" name="TextBox 19"/>
           <p:cNvSpPr txBox="1"/>
           <p:nvPr/>
         </p:nvSpPr>
@@ -7632,7 +9405,7 @@
       </p:sp>
       <p:sp>
         <p:nvSpPr>
-          <p:cNvPr id="23" name="Rectangle 22"/>
+          <p:cNvPr id="21" name="Rectangle 20"/>
           <p:cNvSpPr/>
           <p:nvPr/>
         </p:nvSpPr>
@@ -7675,7 +9448,7 @@
       </p:sp>
       <p:sp>
         <p:nvSpPr>
-          <p:cNvPr id="24" name="TextBox 23"/>
+          <p:cNvPr id="22" name="TextBox 21"/>
           <p:cNvSpPr txBox="1"/>
           <p:nvPr/>
         </p:nvSpPr>
@@ -7703,14 +9476,14 @@
                 </a:solidFill>
                 <a:latin typeface="Calibri"/>
               </a:rPr>
-              <a:t>2</a:t>
-            </a:r>
-          </a:p>
-        </p:txBody>
-      </p:sp>
-      <p:sp>
-        <p:nvSpPr>
-          <p:cNvPr id="25" name="TextBox 24"/>
+              <a:t>70</a:t>
+            </a:r>
+          </a:p>
+        </p:txBody>
+      </p:sp>
+      <p:sp>
+        <p:nvSpPr>
+          <p:cNvPr id="23" name="TextBox 22"/>
           <p:cNvSpPr txBox="1"/>
           <p:nvPr/>
         </p:nvSpPr>
@@ -7739,6 +9512,76 @@
                 <a:latin typeface="Calibri"/>
               </a:rPr>
               <a:t>Disrupted studies</a:t>
+            </a:r>
+          </a:p>
+        </p:txBody>
+      </p:sp>
+      <p:sp>
+        <p:nvSpPr>
+          <p:cNvPr id="24" name="TextBox 23"/>
+          <p:cNvSpPr txBox="1"/>
+          <p:nvPr/>
+        </p:nvSpPr>
+        <p:spPr>
+          <a:xfrm>
+            <a:off x="182880" y="6583680"/>
+            <a:ext cx="8229600" cy="228600"/>
+          </a:xfrm>
+          <a:prstGeom prst="rect">
+            <a:avLst/>
+          </a:prstGeom>
+          <a:noFill/>
+        </p:spPr>
+        <p:txBody>
+          <a:bodyPr wrap="square">
+            <a:spAutoFit/>
+          </a:bodyPr>
+          <a:lstStyle/>
+          <a:p>
+            <a:pPr algn="l"/>
+            <a:r>
+              <a:rPr sz="700" b="0">
+                <a:solidFill>
+                  <a:srgbClr val="5F6B7A"/>
+                </a:solidFill>
+                <a:latin typeface="Calibri"/>
+              </a:rPr>
+              <a:t>Trial Design Explorer | Clinical Trial Planning Intelligence | Confidential draft</a:t>
+            </a:r>
+          </a:p>
+        </p:txBody>
+      </p:sp>
+      <p:sp>
+        <p:nvSpPr>
+          <p:cNvPr id="25" name="TextBox 24"/>
+          <p:cNvSpPr txBox="1"/>
+          <p:nvPr/>
+        </p:nvSpPr>
+        <p:spPr>
+          <a:xfrm>
+            <a:off x="11247120" y="6583680"/>
+            <a:ext cx="914400" cy="228600"/>
+          </a:xfrm>
+          <a:prstGeom prst="rect">
+            <a:avLst/>
+          </a:prstGeom>
+          <a:noFill/>
+        </p:spPr>
+        <p:txBody>
+          <a:bodyPr wrap="square">
+            <a:spAutoFit/>
+          </a:bodyPr>
+          <a:lstStyle/>
+          <a:p>
+            <a:pPr algn="r"/>
+            <a:r>
+              <a:rPr sz="700" b="0">
+                <a:solidFill>
+                  <a:srgbClr val="5F6B7A"/>
+                </a:solidFill>
+                <a:latin typeface="Calibri"/>
+              </a:rPr>
+              <a:t>3 / 12</a:t>
             </a:r>
           </a:p>
         </p:txBody>
@@ -7869,84 +9712,14 @@
                 </a:solidFill>
                 <a:latin typeface="Calibri"/>
               </a:rPr>
-              <a:t>Alignment across 7 design domains — completed vs disrupted precedent</a:t>
-            </a:r>
-          </a:p>
-        </p:txBody>
-      </p:sp>
-      <p:sp>
-        <p:nvSpPr>
-          <p:cNvPr id="5" name="TextBox 4"/>
-          <p:cNvSpPr txBox="1"/>
-          <p:nvPr/>
-        </p:nvSpPr>
-        <p:spPr>
-          <a:xfrm>
-            <a:off x="182880" y="6583680"/>
-            <a:ext cx="8229600" cy="228600"/>
-          </a:xfrm>
-          <a:prstGeom prst="rect">
-            <a:avLst/>
-          </a:prstGeom>
-          <a:noFill/>
-        </p:spPr>
-        <p:txBody>
-          <a:bodyPr wrap="square">
-            <a:spAutoFit/>
-          </a:bodyPr>
-          <a:lstStyle/>
-          <a:p>
-            <a:pPr algn="l"/>
-            <a:r>
-              <a:rPr sz="700" b="0">
-                <a:solidFill>
-                  <a:srgbClr val="5F6B7A"/>
-                </a:solidFill>
-                <a:latin typeface="Calibri"/>
-              </a:rPr>
-              <a:t>Trial Design Explorer | Clinical Trial Planning Intelligence | Confidential draft</a:t>
-            </a:r>
-          </a:p>
-        </p:txBody>
-      </p:sp>
-      <p:sp>
-        <p:nvSpPr>
-          <p:cNvPr id="6" name="TextBox 5"/>
-          <p:cNvSpPr txBox="1"/>
-          <p:nvPr/>
-        </p:nvSpPr>
-        <p:spPr>
-          <a:xfrm>
-            <a:off x="11247120" y="6583680"/>
-            <a:ext cx="914400" cy="228600"/>
-          </a:xfrm>
-          <a:prstGeom prst="rect">
-            <a:avLst/>
-          </a:prstGeom>
-          <a:noFill/>
-        </p:spPr>
-        <p:txBody>
-          <a:bodyPr wrap="square">
-            <a:spAutoFit/>
-          </a:bodyPr>
-          <a:lstStyle/>
-          <a:p>
-            <a:pPr algn="r"/>
-            <a:r>
-              <a:rPr sz="700" b="0">
-                <a:solidFill>
-                  <a:srgbClr val="5F6B7A"/>
-                </a:solidFill>
-                <a:latin typeface="Calibri"/>
-              </a:rPr>
-              <a:t>4 / 11</a:t>
+              <a:t>Alignment across design domains — completed vs disrupted precedent</a:t>
             </a:r>
           </a:p>
         </p:txBody>
       </p:sp>
       <p:pic>
         <p:nvPicPr>
-          <p:cNvPr id="7" name="Picture 6" descr="image.png"/>
+          <p:cNvPr id="5" name="Picture 4" descr="image.png"/>
           <p:cNvPicPr>
             <a:picLocks noChangeAspect="1"/>
           </p:cNvPicPr>
@@ -7970,7 +9743,7 @@
       </p:pic>
       <p:sp>
         <p:nvSpPr>
-          <p:cNvPr id="8" name="TextBox 7"/>
+          <p:cNvPr id="6" name="TextBox 5"/>
           <p:cNvSpPr txBox="1"/>
           <p:nvPr/>
         </p:nvSpPr>
@@ -8005,7 +9778,7 @@
       </p:sp>
       <p:sp>
         <p:nvSpPr>
-          <p:cNvPr id="9" name="Rectangle 8"/>
+          <p:cNvPr id="7" name="Rectangle 6"/>
           <p:cNvSpPr/>
           <p:nvPr/>
         </p:nvSpPr>
@@ -8050,7 +9823,7 @@
       </p:sp>
       <p:sp>
         <p:nvSpPr>
-          <p:cNvPr id="10" name="TextBox 9"/>
+          <p:cNvPr id="8" name="TextBox 7"/>
           <p:cNvSpPr txBox="1"/>
           <p:nvPr/>
         </p:nvSpPr>
@@ -8078,14 +9851,14 @@
                 </a:solidFill>
                 <a:latin typeface="Calibri"/>
               </a:rPr>
-              <a:t>Phase: Phase 3 — Weak precedent signal</a:t>
-            </a:r>
-          </a:p>
-        </p:txBody>
-      </p:sp>
-      <p:sp>
-        <p:nvSpPr>
-          <p:cNvPr id="11" name="Rectangle 10"/>
+              <a:t>Phase: Phase 3b — Weak precedent signal</a:t>
+            </a:r>
+          </a:p>
+        </p:txBody>
+      </p:sp>
+      <p:sp>
+        <p:nvSpPr>
+          <p:cNvPr id="9" name="Rectangle 8"/>
           <p:cNvSpPr/>
           <p:nvPr/>
         </p:nvSpPr>
@@ -8130,7 +9903,7 @@
       </p:sp>
       <p:sp>
         <p:nvSpPr>
-          <p:cNvPr id="12" name="TextBox 11"/>
+          <p:cNvPr id="10" name="TextBox 9"/>
           <p:cNvSpPr txBox="1"/>
           <p:nvPr/>
         </p:nvSpPr>
@@ -8158,14 +9931,14 @@
                 </a:solidFill>
                 <a:latin typeface="Calibri"/>
               </a:rPr>
-              <a:t>Study Type: Interventional — Closer to disrupted precedent</a:t>
-            </a:r>
-          </a:p>
-        </p:txBody>
-      </p:sp>
-      <p:sp>
-        <p:nvSpPr>
-          <p:cNvPr id="13" name="Rectangle 12"/>
+              <a:t>Study Type: Interventional — Mixed precedent</a:t>
+            </a:r>
+          </a:p>
+        </p:txBody>
+      </p:sp>
+      <p:sp>
+        <p:nvSpPr>
+          <p:cNvPr id="11" name="Rectangle 10"/>
           <p:cNvSpPr/>
           <p:nvPr/>
         </p:nvSpPr>
@@ -8210,7 +9983,7 @@
       </p:sp>
       <p:sp>
         <p:nvSpPr>
-          <p:cNvPr id="14" name="TextBox 13"/>
+          <p:cNvPr id="12" name="TextBox 11"/>
           <p:cNvSpPr txBox="1"/>
           <p:nvPr/>
         </p:nvSpPr>
@@ -8238,14 +10011,14 @@
                 </a:solidFill>
                 <a:latin typeface="Calibri"/>
               </a:rPr>
-              <a:t>Allocation: Randomized — Closer to disrupted precedent</a:t>
-            </a:r>
-          </a:p>
-        </p:txBody>
-      </p:sp>
-      <p:sp>
-        <p:nvSpPr>
-          <p:cNvPr id="15" name="Rectangle 14"/>
+              <a:t>Allocation: Randomized — Mixed precedent</a:t>
+            </a:r>
+          </a:p>
+        </p:txBody>
+      </p:sp>
+      <p:sp>
+        <p:nvSpPr>
+          <p:cNvPr id="13" name="Rectangle 12"/>
           <p:cNvSpPr/>
           <p:nvPr/>
         </p:nvSpPr>
@@ -8290,7 +10063,7 @@
       </p:sp>
       <p:sp>
         <p:nvSpPr>
-          <p:cNvPr id="16" name="TextBox 15"/>
+          <p:cNvPr id="14" name="TextBox 13"/>
           <p:cNvSpPr txBox="1"/>
           <p:nvPr/>
         </p:nvSpPr>
@@ -8318,14 +10091,14 @@
                 </a:solidFill>
                 <a:latin typeface="Calibri"/>
               </a:rPr>
-              <a:t>Masking: Single — Closer to disrupted precedent</a:t>
-            </a:r>
-          </a:p>
-        </p:txBody>
-      </p:sp>
-      <p:sp>
-        <p:nvSpPr>
-          <p:cNvPr id="17" name="Rectangle 16"/>
+              <a:t>Masking: Double — Mixed precedent</a:t>
+            </a:r>
+          </a:p>
+        </p:txBody>
+      </p:sp>
+      <p:sp>
+        <p:nvSpPr>
+          <p:cNvPr id="15" name="Rectangle 14"/>
           <p:cNvSpPr/>
           <p:nvPr/>
         </p:nvSpPr>
@@ -8370,7 +10143,7 @@
       </p:sp>
       <p:sp>
         <p:nvSpPr>
-          <p:cNvPr id="18" name="TextBox 17"/>
+          <p:cNvPr id="16" name="TextBox 15"/>
           <p:cNvSpPr txBox="1"/>
           <p:nvPr/>
         </p:nvSpPr>
@@ -8398,14 +10171,14 @@
                 </a:solidFill>
                 <a:latin typeface="Calibri"/>
               </a:rPr>
-              <a:t>Intervention Model: Parallel Assignment — Weak precedent signal</a:t>
-            </a:r>
-          </a:p>
-        </p:txBody>
-      </p:sp>
-      <p:sp>
-        <p:nvSpPr>
-          <p:cNvPr id="19" name="Rectangle 18"/>
+              <a:t>Intervention Model: Crossover Assignment — Weak precedent signal</a:t>
+            </a:r>
+          </a:p>
+        </p:txBody>
+      </p:sp>
+      <p:sp>
+        <p:nvSpPr>
+          <p:cNvPr id="17" name="Rectangle 16"/>
           <p:cNvSpPr/>
           <p:nvPr/>
         </p:nvSpPr>
@@ -8450,7 +10223,7 @@
       </p:sp>
       <p:sp>
         <p:nvSpPr>
-          <p:cNvPr id="20" name="TextBox 19"/>
+          <p:cNvPr id="18" name="TextBox 17"/>
           <p:cNvSpPr txBox="1"/>
           <p:nvPr/>
         </p:nvSpPr>
@@ -8478,14 +10251,14 @@
                 </a:solidFill>
                 <a:latin typeface="Calibri"/>
               </a:rPr>
-              <a:t>Primary Purpose: Treatment — Closer to disrupted precedent</a:t>
-            </a:r>
-          </a:p>
-        </p:txBody>
-      </p:sp>
-      <p:sp>
-        <p:nvSpPr>
-          <p:cNvPr id="21" name="Rectangle 20"/>
+              <a:t>Primary Purpose: Treatment — Mixed precedent</a:t>
+            </a:r>
+          </a:p>
+        </p:txBody>
+      </p:sp>
+      <p:sp>
+        <p:nvSpPr>
+          <p:cNvPr id="19" name="Rectangle 18"/>
           <p:cNvSpPr/>
           <p:nvPr/>
         </p:nvSpPr>
@@ -8530,7 +10303,7 @@
       </p:sp>
       <p:sp>
         <p:nvSpPr>
-          <p:cNvPr id="22" name="TextBox 21"/>
+          <p:cNvPr id="20" name="TextBox 19"/>
           <p:cNvSpPr txBox="1"/>
           <p:nvPr/>
         </p:nvSpPr>
@@ -8559,6 +10332,76 @@
                 <a:latin typeface="Calibri"/>
               </a:rPr>
               <a:t>Endpoint Focus: Other — Mixed precedent</a:t>
+            </a:r>
+          </a:p>
+        </p:txBody>
+      </p:sp>
+      <p:sp>
+        <p:nvSpPr>
+          <p:cNvPr id="21" name="TextBox 20"/>
+          <p:cNvSpPr txBox="1"/>
+          <p:nvPr/>
+        </p:nvSpPr>
+        <p:spPr>
+          <a:xfrm>
+            <a:off x="182880" y="6583680"/>
+            <a:ext cx="8229600" cy="228600"/>
+          </a:xfrm>
+          <a:prstGeom prst="rect">
+            <a:avLst/>
+          </a:prstGeom>
+          <a:noFill/>
+        </p:spPr>
+        <p:txBody>
+          <a:bodyPr wrap="square">
+            <a:spAutoFit/>
+          </a:bodyPr>
+          <a:lstStyle/>
+          <a:p>
+            <a:pPr algn="l"/>
+            <a:r>
+              <a:rPr sz="700" b="0">
+                <a:solidFill>
+                  <a:srgbClr val="5F6B7A"/>
+                </a:solidFill>
+                <a:latin typeface="Calibri"/>
+              </a:rPr>
+              <a:t>Trial Design Explorer | Clinical Trial Planning Intelligence | Confidential draft</a:t>
+            </a:r>
+          </a:p>
+        </p:txBody>
+      </p:sp>
+      <p:sp>
+        <p:nvSpPr>
+          <p:cNvPr id="22" name="TextBox 21"/>
+          <p:cNvSpPr txBox="1"/>
+          <p:nvPr/>
+        </p:nvSpPr>
+        <p:spPr>
+          <a:xfrm>
+            <a:off x="11247120" y="6583680"/>
+            <a:ext cx="914400" cy="228600"/>
+          </a:xfrm>
+          <a:prstGeom prst="rect">
+            <a:avLst/>
+          </a:prstGeom>
+          <a:noFill/>
+        </p:spPr>
+        <p:txBody>
+          <a:bodyPr wrap="square">
+            <a:spAutoFit/>
+          </a:bodyPr>
+          <a:lstStyle/>
+          <a:p>
+            <a:pPr algn="r"/>
+            <a:r>
+              <a:rPr sz="700" b="0">
+                <a:solidFill>
+                  <a:srgbClr val="5F6B7A"/>
+                </a:solidFill>
+                <a:latin typeface="Calibri"/>
+              </a:rPr>
+              <a:t>4 / 12</a:t>
             </a:r>
           </a:p>
         </p:txBody>
@@ -8694,79 +10537,9 @@
           </a:p>
         </p:txBody>
       </p:sp>
-      <p:sp>
-        <p:nvSpPr>
-          <p:cNvPr id="5" name="TextBox 4"/>
-          <p:cNvSpPr txBox="1"/>
-          <p:nvPr/>
-        </p:nvSpPr>
-        <p:spPr>
-          <a:xfrm>
-            <a:off x="182880" y="6583680"/>
-            <a:ext cx="8229600" cy="228600"/>
-          </a:xfrm>
-          <a:prstGeom prst="rect">
-            <a:avLst/>
-          </a:prstGeom>
-          <a:noFill/>
-        </p:spPr>
-        <p:txBody>
-          <a:bodyPr wrap="square">
-            <a:spAutoFit/>
-          </a:bodyPr>
-          <a:lstStyle/>
-          <a:p>
-            <a:pPr algn="l"/>
-            <a:r>
-              <a:rPr sz="700" b="0">
-                <a:solidFill>
-                  <a:srgbClr val="5F6B7A"/>
-                </a:solidFill>
-                <a:latin typeface="Calibri"/>
-              </a:rPr>
-              <a:t>Trial Design Explorer | Clinical Trial Planning Intelligence | Confidential draft</a:t>
-            </a:r>
-          </a:p>
-        </p:txBody>
-      </p:sp>
-      <p:sp>
-        <p:nvSpPr>
-          <p:cNvPr id="6" name="TextBox 5"/>
-          <p:cNvSpPr txBox="1"/>
-          <p:nvPr/>
-        </p:nvSpPr>
-        <p:spPr>
-          <a:xfrm>
-            <a:off x="11247120" y="6583680"/>
-            <a:ext cx="914400" cy="228600"/>
-          </a:xfrm>
-          <a:prstGeom prst="rect">
-            <a:avLst/>
-          </a:prstGeom>
-          <a:noFill/>
-        </p:spPr>
-        <p:txBody>
-          <a:bodyPr wrap="square">
-            <a:spAutoFit/>
-          </a:bodyPr>
-          <a:lstStyle/>
-          <a:p>
-            <a:pPr algn="r"/>
-            <a:r>
-              <a:rPr sz="700" b="0">
-                <a:solidFill>
-                  <a:srgbClr val="5F6B7A"/>
-                </a:solidFill>
-                <a:latin typeface="Calibri"/>
-              </a:rPr>
-              <a:t>5 / 11</a:t>
-            </a:r>
-          </a:p>
-        </p:txBody>
-      </p:sp>
       <p:pic>
         <p:nvPicPr>
-          <p:cNvPr id="7" name="Picture 6" descr="image.png"/>
+          <p:cNvPr id="5" name="Picture 4" descr="image.png"/>
           <p:cNvPicPr>
             <a:picLocks noChangeAspect="1"/>
           </p:cNvPicPr>
@@ -8790,7 +10563,7 @@
       </p:pic>
       <p:sp>
         <p:nvSpPr>
-          <p:cNvPr id="8" name="TextBox 7"/>
+          <p:cNvPr id="6" name="TextBox 5"/>
           <p:cNvSpPr txBox="1"/>
           <p:nvPr/>
         </p:nvSpPr>
@@ -8825,7 +10598,7 @@
       </p:sp>
       <p:sp>
         <p:nvSpPr>
-          <p:cNvPr id="9" name="Rectangle 8"/>
+          <p:cNvPr id="7" name="Rectangle 6"/>
           <p:cNvSpPr/>
           <p:nvPr/>
         </p:nvSpPr>
@@ -8870,7 +10643,7 @@
       </p:sp>
       <p:sp>
         <p:nvSpPr>
-          <p:cNvPr id="10" name="TextBox 9"/>
+          <p:cNvPr id="8" name="TextBox 7"/>
           <p:cNvSpPr txBox="1"/>
           <p:nvPr/>
         </p:nvSpPr>
@@ -8905,7 +10678,7 @@
       </p:sp>
       <p:sp>
         <p:nvSpPr>
-          <p:cNvPr id="11" name="TextBox 10"/>
+          <p:cNvPr id="9" name="TextBox 8"/>
           <p:cNvSpPr txBox="1"/>
           <p:nvPr/>
         </p:nvSpPr>
@@ -8933,14 +10706,14 @@
                 </a:solidFill>
                 <a:latin typeface="Calibri"/>
               </a:rPr>
-              <a:t>94</a:t>
-            </a:r>
-          </a:p>
-        </p:txBody>
-      </p:sp>
-      <p:sp>
-        <p:nvSpPr>
-          <p:cNvPr id="12" name="Rectangle 11"/>
+              <a:t>n/a</a:t>
+            </a:r>
+          </a:p>
+        </p:txBody>
+      </p:sp>
+      <p:sp>
+        <p:nvSpPr>
+          <p:cNvPr id="10" name="Rectangle 9"/>
           <p:cNvSpPr/>
           <p:nvPr/>
         </p:nvSpPr>
@@ -8985,7 +10758,7 @@
       </p:sp>
       <p:sp>
         <p:nvSpPr>
-          <p:cNvPr id="13" name="TextBox 12"/>
+          <p:cNvPr id="11" name="TextBox 10"/>
           <p:cNvSpPr txBox="1"/>
           <p:nvPr/>
         </p:nvSpPr>
@@ -9020,7 +10793,7 @@
       </p:sp>
       <p:sp>
         <p:nvSpPr>
-          <p:cNvPr id="14" name="TextBox 13"/>
+          <p:cNvPr id="12" name="TextBox 11"/>
           <p:cNvSpPr txBox="1"/>
           <p:nvPr/>
         </p:nvSpPr>
@@ -9048,14 +10821,14 @@
                 </a:solidFill>
                 <a:latin typeface="Calibri"/>
               </a:rPr>
-              <a:t>95.0</a:t>
-            </a:r>
-          </a:p>
-        </p:txBody>
-      </p:sp>
-      <p:sp>
-        <p:nvSpPr>
-          <p:cNvPr id="15" name="Rectangle 14"/>
+              <a:t>106.0</a:t>
+            </a:r>
+          </a:p>
+        </p:txBody>
+      </p:sp>
+      <p:sp>
+        <p:nvSpPr>
+          <p:cNvPr id="13" name="Rectangle 12"/>
           <p:cNvSpPr/>
           <p:nvPr/>
         </p:nvSpPr>
@@ -9100,7 +10873,7 @@
       </p:sp>
       <p:sp>
         <p:nvSpPr>
-          <p:cNvPr id="16" name="TextBox 15"/>
+          <p:cNvPr id="14" name="TextBox 13"/>
           <p:cNvSpPr txBox="1"/>
           <p:nvPr/>
         </p:nvSpPr>
@@ -9135,7 +10908,7 @@
       </p:sp>
       <p:sp>
         <p:nvSpPr>
-          <p:cNvPr id="17" name="TextBox 16"/>
+          <p:cNvPr id="15" name="TextBox 14"/>
           <p:cNvSpPr txBox="1"/>
           <p:nvPr/>
         </p:nvSpPr>
@@ -9163,14 +10936,14 @@
                 </a:solidFill>
                 <a:latin typeface="Calibri"/>
               </a:rPr>
-              <a:t>59.2 – 157.0</a:t>
-            </a:r>
-          </a:p>
-        </p:txBody>
-      </p:sp>
-      <p:sp>
-        <p:nvSpPr>
-          <p:cNvPr id="18" name="Rectangle 17"/>
+              <a:t>40.0 – 350.5</a:t>
+            </a:r>
+          </a:p>
+        </p:txBody>
+      </p:sp>
+      <p:sp>
+        <p:nvSpPr>
+          <p:cNvPr id="16" name="Rectangle 15"/>
           <p:cNvSpPr/>
           <p:nvPr/>
         </p:nvSpPr>
@@ -9215,7 +10988,7 @@
       </p:sp>
       <p:sp>
         <p:nvSpPr>
-          <p:cNvPr id="19" name="TextBox 18"/>
+          <p:cNvPr id="17" name="TextBox 16"/>
           <p:cNvSpPr txBox="1"/>
           <p:nvPr/>
         </p:nvSpPr>
@@ -9250,7 +11023,7 @@
       </p:sp>
       <p:sp>
         <p:nvSpPr>
-          <p:cNvPr id="20" name="TextBox 19"/>
+          <p:cNvPr id="18" name="TextBox 17"/>
           <p:cNvSpPr txBox="1"/>
           <p:nvPr/>
         </p:nvSpPr>
@@ -9278,14 +11051,14 @@
                 </a:solidFill>
                 <a:latin typeface="Calibri"/>
               </a:rPr>
-              <a:t>61.5</a:t>
-            </a:r>
-          </a:p>
-        </p:txBody>
-      </p:sp>
-      <p:sp>
-        <p:nvSpPr>
-          <p:cNvPr id="21" name="Rectangle 20"/>
+              <a:t>9.5</a:t>
+            </a:r>
+          </a:p>
+        </p:txBody>
+      </p:sp>
+      <p:sp>
+        <p:nvSpPr>
+          <p:cNvPr id="19" name="Rectangle 18"/>
           <p:cNvSpPr/>
           <p:nvPr/>
         </p:nvSpPr>
@@ -9330,7 +11103,7 @@
       </p:sp>
       <p:sp>
         <p:nvSpPr>
-          <p:cNvPr id="22" name="TextBox 21"/>
+          <p:cNvPr id="20" name="TextBox 19"/>
           <p:cNvSpPr txBox="1"/>
           <p:nvPr/>
         </p:nvSpPr>
@@ -9365,7 +11138,7 @@
       </p:sp>
       <p:sp>
         <p:nvSpPr>
-          <p:cNvPr id="23" name="TextBox 22"/>
+          <p:cNvPr id="21" name="TextBox 20"/>
           <p:cNvSpPr txBox="1"/>
           <p:nvPr/>
         </p:nvSpPr>
@@ -9393,7 +11166,77 @@
                 </a:solidFill>
                 <a:latin typeface="Calibri"/>
               </a:rPr>
-              <a:t>34.8 – 88.2</a:t>
+              <a:t>0.0 – 57.0</a:t>
+            </a:r>
+          </a:p>
+        </p:txBody>
+      </p:sp>
+      <p:sp>
+        <p:nvSpPr>
+          <p:cNvPr id="22" name="TextBox 21"/>
+          <p:cNvSpPr txBox="1"/>
+          <p:nvPr/>
+        </p:nvSpPr>
+        <p:spPr>
+          <a:xfrm>
+            <a:off x="182880" y="6583680"/>
+            <a:ext cx="8229600" cy="228600"/>
+          </a:xfrm>
+          <a:prstGeom prst="rect">
+            <a:avLst/>
+          </a:prstGeom>
+          <a:noFill/>
+        </p:spPr>
+        <p:txBody>
+          <a:bodyPr wrap="square">
+            <a:spAutoFit/>
+          </a:bodyPr>
+          <a:lstStyle/>
+          <a:p>
+            <a:pPr algn="l"/>
+            <a:r>
+              <a:rPr sz="700" b="0">
+                <a:solidFill>
+                  <a:srgbClr val="5F6B7A"/>
+                </a:solidFill>
+                <a:latin typeface="Calibri"/>
+              </a:rPr>
+              <a:t>Trial Design Explorer | Clinical Trial Planning Intelligence | Confidential draft</a:t>
+            </a:r>
+          </a:p>
+        </p:txBody>
+      </p:sp>
+      <p:sp>
+        <p:nvSpPr>
+          <p:cNvPr id="23" name="TextBox 22"/>
+          <p:cNvSpPr txBox="1"/>
+          <p:nvPr/>
+        </p:nvSpPr>
+        <p:spPr>
+          <a:xfrm>
+            <a:off x="11247120" y="6583680"/>
+            <a:ext cx="914400" cy="228600"/>
+          </a:xfrm>
+          <a:prstGeom prst="rect">
+            <a:avLst/>
+          </a:prstGeom>
+          <a:noFill/>
+        </p:spPr>
+        <p:txBody>
+          <a:bodyPr wrap="square">
+            <a:spAutoFit/>
+          </a:bodyPr>
+          <a:lstStyle/>
+          <a:p>
+            <a:pPr algn="r"/>
+            <a:r>
+              <a:rPr sz="700" b="0">
+                <a:solidFill>
+                  <a:srgbClr val="5F6B7A"/>
+                </a:solidFill>
+                <a:latin typeface="Calibri"/>
+              </a:rPr>
+              <a:t>5 / 12</a:t>
             </a:r>
           </a:p>
         </p:txBody>
@@ -9529,79 +11372,9 @@
           </a:p>
         </p:txBody>
       </p:sp>
-      <p:sp>
-        <p:nvSpPr>
-          <p:cNvPr id="5" name="TextBox 4"/>
-          <p:cNvSpPr txBox="1"/>
-          <p:nvPr/>
-        </p:nvSpPr>
-        <p:spPr>
-          <a:xfrm>
-            <a:off x="182880" y="6583680"/>
-            <a:ext cx="8229600" cy="228600"/>
-          </a:xfrm>
-          <a:prstGeom prst="rect">
-            <a:avLst/>
-          </a:prstGeom>
-          <a:noFill/>
-        </p:spPr>
-        <p:txBody>
-          <a:bodyPr wrap="square">
-            <a:spAutoFit/>
-          </a:bodyPr>
-          <a:lstStyle/>
-          <a:p>
-            <a:pPr algn="l"/>
-            <a:r>
-              <a:rPr sz="700" b="0">
-                <a:solidFill>
-                  <a:srgbClr val="5F6B7A"/>
-                </a:solidFill>
-                <a:latin typeface="Calibri"/>
-              </a:rPr>
-              <a:t>Trial Design Explorer | Clinical Trial Planning Intelligence | Confidential draft</a:t>
-            </a:r>
-          </a:p>
-        </p:txBody>
-      </p:sp>
-      <p:sp>
-        <p:nvSpPr>
-          <p:cNvPr id="6" name="TextBox 5"/>
-          <p:cNvSpPr txBox="1"/>
-          <p:nvPr/>
-        </p:nvSpPr>
-        <p:spPr>
-          <a:xfrm>
-            <a:off x="11247120" y="6583680"/>
-            <a:ext cx="914400" cy="228600"/>
-          </a:xfrm>
-          <a:prstGeom prst="rect">
-            <a:avLst/>
-          </a:prstGeom>
-          <a:noFill/>
-        </p:spPr>
-        <p:txBody>
-          <a:bodyPr wrap="square">
-            <a:spAutoFit/>
-          </a:bodyPr>
-          <a:lstStyle/>
-          <a:p>
-            <a:pPr algn="r"/>
-            <a:r>
-              <a:rPr sz="700" b="0">
-                <a:solidFill>
-                  <a:srgbClr val="5F6B7A"/>
-                </a:solidFill>
-                <a:latin typeface="Calibri"/>
-              </a:rPr>
-              <a:t>6 / 11</a:t>
-            </a:r>
-          </a:p>
-        </p:txBody>
-      </p:sp>
       <p:pic>
         <p:nvPicPr>
-          <p:cNvPr id="7" name="Picture 6" descr="image.png"/>
+          <p:cNvPr id="5" name="Picture 4" descr="image.png"/>
           <p:cNvPicPr>
             <a:picLocks noChangeAspect="1"/>
           </p:cNvPicPr>
@@ -9625,7 +11398,7 @@
       </p:pic>
       <p:sp>
         <p:nvSpPr>
-          <p:cNvPr id="8" name="TextBox 7"/>
+          <p:cNvPr id="6" name="TextBox 5"/>
           <p:cNvSpPr txBox="1"/>
           <p:nvPr/>
         </p:nvSpPr>
@@ -9660,7 +11433,7 @@
       </p:sp>
       <p:sp>
         <p:nvSpPr>
-          <p:cNvPr id="9" name="Rectangle 8"/>
+          <p:cNvPr id="7" name="Rectangle 6"/>
           <p:cNvSpPr/>
           <p:nvPr/>
         </p:nvSpPr>
@@ -9705,7 +11478,7 @@
       </p:sp>
       <p:sp>
         <p:nvSpPr>
-          <p:cNvPr id="10" name="TextBox 9"/>
+          <p:cNvPr id="8" name="TextBox 7"/>
           <p:cNvSpPr txBox="1"/>
           <p:nvPr/>
         </p:nvSpPr>
@@ -9740,7 +11513,7 @@
       </p:sp>
       <p:sp>
         <p:nvSpPr>
-          <p:cNvPr id="11" name="TextBox 10"/>
+          <p:cNvPr id="9" name="TextBox 8"/>
           <p:cNvSpPr txBox="1"/>
           <p:nvPr/>
         </p:nvSpPr>
@@ -9775,7 +11548,7 @@
       </p:sp>
       <p:sp>
         <p:nvSpPr>
-          <p:cNvPr id="12" name="Rectangle 11"/>
+          <p:cNvPr id="10" name="Rectangle 9"/>
           <p:cNvSpPr/>
           <p:nvPr/>
         </p:nvSpPr>
@@ -9820,7 +11593,7 @@
       </p:sp>
       <p:sp>
         <p:nvSpPr>
-          <p:cNvPr id="13" name="TextBox 12"/>
+          <p:cNvPr id="11" name="TextBox 10"/>
           <p:cNvSpPr txBox="1"/>
           <p:nvPr/>
         </p:nvSpPr>
@@ -9855,7 +11628,7 @@
       </p:sp>
       <p:sp>
         <p:nvSpPr>
-          <p:cNvPr id="14" name="TextBox 13"/>
+          <p:cNvPr id="12" name="TextBox 11"/>
           <p:cNvSpPr txBox="1"/>
           <p:nvPr/>
         </p:nvSpPr>
@@ -9883,14 +11656,14 @@
                 </a:solidFill>
                 <a:latin typeface="Calibri"/>
               </a:rPr>
-              <a:t>35</a:t>
-            </a:r>
-          </a:p>
-        </p:txBody>
-      </p:sp>
-      <p:sp>
-        <p:nvSpPr>
-          <p:cNvPr id="15" name="Rectangle 14"/>
+              <a:t>23</a:t>
+            </a:r>
+          </a:p>
+        </p:txBody>
+      </p:sp>
+      <p:sp>
+        <p:nvSpPr>
+          <p:cNvPr id="13" name="Rectangle 12"/>
           <p:cNvSpPr/>
           <p:nvPr/>
         </p:nvSpPr>
@@ -9935,7 +11708,7 @@
       </p:sp>
       <p:sp>
         <p:nvSpPr>
-          <p:cNvPr id="16" name="TextBox 15"/>
+          <p:cNvPr id="14" name="TextBox 13"/>
           <p:cNvSpPr txBox="1"/>
           <p:nvPr/>
         </p:nvSpPr>
@@ -9970,7 +11743,7 @@
       </p:sp>
       <p:sp>
         <p:nvSpPr>
-          <p:cNvPr id="17" name="TextBox 16"/>
+          <p:cNvPr id="15" name="TextBox 14"/>
           <p:cNvSpPr txBox="1"/>
           <p:nvPr/>
         </p:nvSpPr>
@@ -9998,7 +11771,77 @@
                 </a:solidFill>
                 <a:latin typeface="Calibri"/>
               </a:rPr>
-              <a:t>12</a:t>
+              <a:t>20</a:t>
+            </a:r>
+          </a:p>
+        </p:txBody>
+      </p:sp>
+      <p:sp>
+        <p:nvSpPr>
+          <p:cNvPr id="16" name="TextBox 15"/>
+          <p:cNvSpPr txBox="1"/>
+          <p:nvPr/>
+        </p:nvSpPr>
+        <p:spPr>
+          <a:xfrm>
+            <a:off x="182880" y="6583680"/>
+            <a:ext cx="8229600" cy="228600"/>
+          </a:xfrm>
+          <a:prstGeom prst="rect">
+            <a:avLst/>
+          </a:prstGeom>
+          <a:noFill/>
+        </p:spPr>
+        <p:txBody>
+          <a:bodyPr wrap="square">
+            <a:spAutoFit/>
+          </a:bodyPr>
+          <a:lstStyle/>
+          <a:p>
+            <a:pPr algn="l"/>
+            <a:r>
+              <a:rPr sz="700" b="0">
+                <a:solidFill>
+                  <a:srgbClr val="5F6B7A"/>
+                </a:solidFill>
+                <a:latin typeface="Calibri"/>
+              </a:rPr>
+              <a:t>Trial Design Explorer | Clinical Trial Planning Intelligence | Confidential draft</a:t>
+            </a:r>
+          </a:p>
+        </p:txBody>
+      </p:sp>
+      <p:sp>
+        <p:nvSpPr>
+          <p:cNvPr id="17" name="TextBox 16"/>
+          <p:cNvSpPr txBox="1"/>
+          <p:nvPr/>
+        </p:nvSpPr>
+        <p:spPr>
+          <a:xfrm>
+            <a:off x="11247120" y="6583680"/>
+            <a:ext cx="914400" cy="228600"/>
+          </a:xfrm>
+          <a:prstGeom prst="rect">
+            <a:avLst/>
+          </a:prstGeom>
+          <a:noFill/>
+        </p:spPr>
+        <p:txBody>
+          <a:bodyPr wrap="square">
+            <a:spAutoFit/>
+          </a:bodyPr>
+          <a:lstStyle/>
+          <a:p>
+            <a:pPr algn="r"/>
+            <a:r>
+              <a:rPr sz="700" b="0">
+                <a:solidFill>
+                  <a:srgbClr val="5F6B7A"/>
+                </a:solidFill>
+                <a:latin typeface="Calibri"/>
+              </a:rPr>
+              <a:t>6 / 12</a:t>
             </a:r>
           </a:p>
         </p:txBody>
@@ -10134,9 +11977,33 @@
           </a:p>
         </p:txBody>
       </p:sp>
-      <p:sp>
-        <p:nvSpPr>
-          <p:cNvPr id="5" name="TextBox 4"/>
+      <p:pic>
+        <p:nvPicPr>
+          <p:cNvPr id="5" name="Picture 4" descr="image.png"/>
+          <p:cNvPicPr>
+            <a:picLocks noChangeAspect="1"/>
+          </p:cNvPicPr>
+          <p:nvPr/>
+        </p:nvPicPr>
+        <p:blipFill>
+          <a:blip r:embed="rId2"/>
+          <a:stretch>
+            <a:fillRect/>
+          </a:stretch>
+        </p:blipFill>
+        <p:spPr>
+          <a:xfrm>
+            <a:off x="274320" y="914400"/>
+            <a:ext cx="11430000" cy="5029200"/>
+          </a:xfrm>
+          <a:prstGeom prst="rect">
+            <a:avLst/>
+          </a:prstGeom>
+        </p:spPr>
+      </p:pic>
+      <p:sp>
+        <p:nvSpPr>
+          <p:cNvPr id="6" name="TextBox 5"/>
           <p:cNvSpPr txBox="1"/>
           <p:nvPr/>
         </p:nvSpPr>
@@ -10171,7 +12038,7 @@
       </p:sp>
       <p:sp>
         <p:nvSpPr>
-          <p:cNvPr id="6" name="TextBox 5"/>
+          <p:cNvPr id="7" name="TextBox 6"/>
           <p:cNvSpPr txBox="1"/>
           <p:nvPr/>
         </p:nvSpPr>
@@ -10199,35 +12066,11 @@
                 </a:solidFill>
                 <a:latin typeface="Calibri"/>
               </a:rPr>
-              <a:t>7 / 11</a:t>
-            </a:r>
-          </a:p>
-        </p:txBody>
-      </p:sp>
-      <p:pic>
-        <p:nvPicPr>
-          <p:cNvPr id="7" name="Picture 6" descr="image.png"/>
-          <p:cNvPicPr>
-            <a:picLocks noChangeAspect="1"/>
-          </p:cNvPicPr>
-          <p:nvPr/>
-        </p:nvPicPr>
-        <p:blipFill>
-          <a:blip r:embed="rId2"/>
-          <a:stretch>
-            <a:fillRect/>
-          </a:stretch>
-        </p:blipFill>
-        <p:spPr>
-          <a:xfrm>
-            <a:off x="274320" y="914400"/>
-            <a:ext cx="11430000" cy="5029200"/>
-          </a:xfrm>
-          <a:prstGeom prst="rect">
-            <a:avLst/>
-          </a:prstGeom>
-        </p:spPr>
-      </p:pic>
+              <a:t>7 / 12</a:t>
+            </a:r>
+          </a:p>
+        </p:txBody>
+      </p:sp>
     </p:spTree>
   </p:cSld>
   <p:clrMapOvr>
@@ -10359,79 +12202,9 @@
           </a:p>
         </p:txBody>
       </p:sp>
-      <p:sp>
-        <p:nvSpPr>
-          <p:cNvPr id="5" name="TextBox 4"/>
-          <p:cNvSpPr txBox="1"/>
-          <p:nvPr/>
-        </p:nvSpPr>
-        <p:spPr>
-          <a:xfrm>
-            <a:off x="182880" y="6583680"/>
-            <a:ext cx="8229600" cy="228600"/>
-          </a:xfrm>
-          <a:prstGeom prst="rect">
-            <a:avLst/>
-          </a:prstGeom>
-          <a:noFill/>
-        </p:spPr>
-        <p:txBody>
-          <a:bodyPr wrap="square">
-            <a:spAutoFit/>
-          </a:bodyPr>
-          <a:lstStyle/>
-          <a:p>
-            <a:pPr algn="l"/>
-            <a:r>
-              <a:rPr sz="700" b="0">
-                <a:solidFill>
-                  <a:srgbClr val="5F6B7A"/>
-                </a:solidFill>
-                <a:latin typeface="Calibri"/>
-              </a:rPr>
-              <a:t>Trial Design Explorer | Clinical Trial Planning Intelligence | Confidential draft</a:t>
-            </a:r>
-          </a:p>
-        </p:txBody>
-      </p:sp>
-      <p:sp>
-        <p:nvSpPr>
-          <p:cNvPr id="6" name="TextBox 5"/>
-          <p:cNvSpPr txBox="1"/>
-          <p:nvPr/>
-        </p:nvSpPr>
-        <p:spPr>
-          <a:xfrm>
-            <a:off x="11247120" y="6583680"/>
-            <a:ext cx="914400" cy="228600"/>
-          </a:xfrm>
-          <a:prstGeom prst="rect">
-            <a:avLst/>
-          </a:prstGeom>
-          <a:noFill/>
-        </p:spPr>
-        <p:txBody>
-          <a:bodyPr wrap="square">
-            <a:spAutoFit/>
-          </a:bodyPr>
-          <a:lstStyle/>
-          <a:p>
-            <a:pPr algn="r"/>
-            <a:r>
-              <a:rPr sz="700" b="0">
-                <a:solidFill>
-                  <a:srgbClr val="5F6B7A"/>
-                </a:solidFill>
-                <a:latin typeface="Calibri"/>
-              </a:rPr>
-              <a:t>8 / 11</a:t>
-            </a:r>
-          </a:p>
-        </p:txBody>
-      </p:sp>
       <p:graphicFrame>
         <p:nvGraphicFramePr>
-          <p:cNvPr id="7" name="Table 6"/>
+          <p:cNvPr id="5" name="Table 4"/>
           <p:cNvGraphicFramePr>
             <a:graphicFrameLocks noGrp="1"/>
           </p:cNvGraphicFramePr>
@@ -10454,7 +12227,7 @@
                 <a:gridCol w="2340864"/>
                 <a:gridCol w="2340864"/>
               </a:tblGrid>
-              <a:tr h="809897">
+              <a:tr h="2834640">
                 <a:tc>
                   <a:txBody>
                     <a:bodyPr/>
@@ -10571,7 +12344,7 @@
                   </a:tcPr>
                 </a:tc>
               </a:tr>
-              <a:tr h="809897">
+              <a:tr h="2834640">
                 <a:tc>
                   <a:txBody>
                     <a:bodyPr/>
@@ -10585,7 +12358,7 @@
                           </a:solidFill>
                           <a:latin typeface="Calibri"/>
                         </a:rPr>
-                        <a:t>High</a:t>
+                        <a:t>Monitor</a:t>
                       </a:r>
                     </a:p>
                   </a:txBody>
@@ -10608,7 +12381,7 @@
                           </a:solidFill>
                           <a:latin typeface="Calibri"/>
                         </a:rPr>
-                        <a:t>Allocation</a:t>
+                        <a:t>Overall review</a:t>
                       </a:r>
                     </a:p>
                   </a:txBody>
@@ -10631,7 +12404,7 @@
                           </a:solidFill>
                           <a:latin typeface="Calibri"/>
                         </a:rPr>
-                        <a:t>Challenge</a:t>
+                        <a:t>Monitor</a:t>
                       </a:r>
                     </a:p>
                   </a:txBody>
@@ -10654,7 +12427,7 @@
                           </a:solidFill>
                           <a:latin typeface="Calibri"/>
                         </a:rPr>
-                        <a:t>Revisit the allocation strategy or document why the current choice remains defen</a:t>
+                        <a:t>No strong design outlier was detected in the current benchmark snapshot.</a:t>
                       </a:r>
                     </a:p>
                   </a:txBody>
@@ -10677,598 +12450,13 @@
                           </a:solidFill>
                           <a:latin typeface="Calibri"/>
                         </a:rPr>
-                        <a:t>Completed match 50.0% versus disrupted match 100.0%.</a:t>
+                        <a:t>Continue with clinical, statistical, operational, and regulatory review before f</a:t>
                       </a:r>
                     </a:p>
                   </a:txBody>
                   <a:tcPr>
                     <a:solidFill>
                       <a:srgbClr val="FFFFFF"/>
-                    </a:solidFill>
-                  </a:tcPr>
-                </a:tc>
-              </a:tr>
-              <a:tr h="809897">
-                <a:tc>
-                  <a:txBody>
-                    <a:bodyPr/>
-                    <a:lstStyle/>
-                    <a:p>
-                      <a:pPr algn="l"/>
-                      <a:r>
-                        <a:rPr sz="800">
-                          <a:solidFill>
-                            <a:srgbClr val="15324A"/>
-                          </a:solidFill>
-                          <a:latin typeface="Calibri"/>
-                        </a:rPr>
-                        <a:t>High</a:t>
-                      </a:r>
-                    </a:p>
-                  </a:txBody>
-                  <a:tcPr>
-                    <a:solidFill>
-                      <a:srgbClr val="EDF3F7"/>
-                    </a:solidFill>
-                  </a:tcPr>
-                </a:tc>
-                <a:tc>
-                  <a:txBody>
-                    <a:bodyPr/>
-                    <a:lstStyle/>
-                    <a:p>
-                      <a:pPr algn="l"/>
-                      <a:r>
-                        <a:rPr sz="800">
-                          <a:solidFill>
-                            <a:srgbClr val="15324A"/>
-                          </a:solidFill>
-                          <a:latin typeface="Calibri"/>
-                        </a:rPr>
-                        <a:t>Masking</a:t>
-                      </a:r>
-                    </a:p>
-                  </a:txBody>
-                  <a:tcPr>
-                    <a:solidFill>
-                      <a:srgbClr val="EDF3F7"/>
-                    </a:solidFill>
-                  </a:tcPr>
-                </a:tc>
-                <a:tc>
-                  <a:txBody>
-                    <a:bodyPr/>
-                    <a:lstStyle/>
-                    <a:p>
-                      <a:pPr algn="l"/>
-                      <a:r>
-                        <a:rPr sz="800">
-                          <a:solidFill>
-                            <a:srgbClr val="15324A"/>
-                          </a:solidFill>
-                          <a:latin typeface="Calibri"/>
-                        </a:rPr>
-                        <a:t>Challenge</a:t>
-                      </a:r>
-                    </a:p>
-                  </a:txBody>
-                  <a:tcPr>
-                    <a:solidFill>
-                      <a:srgbClr val="EDF3F7"/>
-                    </a:solidFill>
-                  </a:tcPr>
-                </a:tc>
-                <a:tc>
-                  <a:txBody>
-                    <a:bodyPr/>
-                    <a:lstStyle/>
-                    <a:p>
-                      <a:pPr algn="l"/>
-                      <a:r>
-                        <a:rPr sz="800">
-                          <a:solidFill>
-                            <a:srgbClr val="15324A"/>
-                          </a:solidFill>
-                          <a:latin typeface="Calibri"/>
-                        </a:rPr>
-                        <a:t>Reassess the masking plan and explicitly document any trade-off between feasibil</a:t>
-                      </a:r>
-                    </a:p>
-                  </a:txBody>
-                  <a:tcPr>
-                    <a:solidFill>
-                      <a:srgbClr val="EDF3F7"/>
-                    </a:solidFill>
-                  </a:tcPr>
-                </a:tc>
-                <a:tc>
-                  <a:txBody>
-                    <a:bodyPr/>
-                    <a:lstStyle/>
-                    <a:p>
-                      <a:pPr algn="l"/>
-                      <a:r>
-                        <a:rPr sz="800">
-                          <a:solidFill>
-                            <a:srgbClr val="15324A"/>
-                          </a:solidFill>
-                          <a:latin typeface="Calibri"/>
-                        </a:rPr>
-                        <a:t>Completed match 20.0% versus disrupted match 50.0%.</a:t>
-                      </a:r>
-                    </a:p>
-                  </a:txBody>
-                  <a:tcPr>
-                    <a:solidFill>
-                      <a:srgbClr val="EDF3F7"/>
-                    </a:solidFill>
-                  </a:tcPr>
-                </a:tc>
-              </a:tr>
-              <a:tr h="809897">
-                <a:tc>
-                  <a:txBody>
-                    <a:bodyPr/>
-                    <a:lstStyle/>
-                    <a:p>
-                      <a:pPr algn="l"/>
-                      <a:r>
-                        <a:rPr sz="800">
-                          <a:solidFill>
-                            <a:srgbClr val="15324A"/>
-                          </a:solidFill>
-                          <a:latin typeface="Calibri"/>
-                        </a:rPr>
-                        <a:t>High</a:t>
-                      </a:r>
-                    </a:p>
-                  </a:txBody>
-                  <a:tcPr>
-                    <a:solidFill>
-                      <a:srgbClr val="FFFFFF"/>
-                    </a:solidFill>
-                  </a:tcPr>
-                </a:tc>
-                <a:tc>
-                  <a:txBody>
-                    <a:bodyPr/>
-                    <a:lstStyle/>
-                    <a:p>
-                      <a:pPr algn="l"/>
-                      <a:r>
-                        <a:rPr sz="800">
-                          <a:solidFill>
-                            <a:srgbClr val="15324A"/>
-                          </a:solidFill>
-                          <a:latin typeface="Calibri"/>
-                        </a:rPr>
-                        <a:t>Overall design posture</a:t>
-                      </a:r>
-                    </a:p>
-                  </a:txBody>
-                  <a:tcPr>
-                    <a:solidFill>
-                      <a:srgbClr val="FFFFFF"/>
-                    </a:solidFill>
-                  </a:tcPr>
-                </a:tc>
-                <a:tc>
-                  <a:txBody>
-                    <a:bodyPr/>
-                    <a:lstStyle/>
-                    <a:p>
-                      <a:pPr algn="l"/>
-                      <a:r>
-                        <a:rPr sz="800">
-                          <a:solidFill>
-                            <a:srgbClr val="15324A"/>
-                          </a:solidFill>
-                          <a:latin typeface="Calibri"/>
-                        </a:rPr>
-                        <a:t>Challenge</a:t>
-                      </a:r>
-                    </a:p>
-                  </a:txBody>
-                  <a:tcPr>
-                    <a:solidFill>
-                      <a:srgbClr val="FFFFFF"/>
-                    </a:solidFill>
-                  </a:tcPr>
-                </a:tc>
-                <a:tc>
-                  <a:txBody>
-                    <a:bodyPr/>
-                    <a:lstStyle/>
-                    <a:p>
-                      <a:pPr algn="l"/>
-                      <a:r>
-                        <a:rPr sz="800">
-                          <a:solidFill>
-                            <a:srgbClr val="15324A"/>
-                          </a:solidFill>
-                          <a:latin typeface="Calibri"/>
-                        </a:rPr>
-                        <a:t>Rework the draft so it aligns more closely with completed-trial precedent before</a:t>
-                      </a:r>
-                    </a:p>
-                  </a:txBody>
-                  <a:tcPr>
-                    <a:solidFill>
-                      <a:srgbClr val="FFFFFF"/>
-                    </a:solidFill>
-                  </a:tcPr>
-                </a:tc>
-                <a:tc>
-                  <a:txBody>
-                    <a:bodyPr/>
-                    <a:lstStyle/>
-                    <a:p>
-                      <a:pPr algn="l"/>
-                      <a:r>
-                        <a:rPr sz="800">
-                          <a:solidFill>
-                            <a:srgbClr val="15324A"/>
-                          </a:solidFill>
-                          <a:latin typeface="Calibri"/>
-                        </a:rPr>
-                        <a:t>Completed fit 38.6% versus disrupted fit 64.3%.</a:t>
-                      </a:r>
-                    </a:p>
-                  </a:txBody>
-                  <a:tcPr>
-                    <a:solidFill>
-                      <a:srgbClr val="FFFFFF"/>
-                    </a:solidFill>
-                  </a:tcPr>
-                </a:tc>
-              </a:tr>
-              <a:tr h="809897">
-                <a:tc>
-                  <a:txBody>
-                    <a:bodyPr/>
-                    <a:lstStyle/>
-                    <a:p>
-                      <a:pPr algn="l"/>
-                      <a:r>
-                        <a:rPr sz="800">
-                          <a:solidFill>
-                            <a:srgbClr val="15324A"/>
-                          </a:solidFill>
-                          <a:latin typeface="Calibri"/>
-                        </a:rPr>
-                        <a:t>High</a:t>
-                      </a:r>
-                    </a:p>
-                  </a:txBody>
-                  <a:tcPr>
-                    <a:solidFill>
-                      <a:srgbClr val="EDF3F7"/>
-                    </a:solidFill>
-                  </a:tcPr>
-                </a:tc>
-                <a:tc>
-                  <a:txBody>
-                    <a:bodyPr/>
-                    <a:lstStyle/>
-                    <a:p>
-                      <a:pPr algn="l"/>
-                      <a:r>
-                        <a:rPr sz="800">
-                          <a:solidFill>
-                            <a:srgbClr val="15324A"/>
-                          </a:solidFill>
-                          <a:latin typeface="Calibri"/>
-                        </a:rPr>
-                        <a:t>Primary Purpose</a:t>
-                      </a:r>
-                    </a:p>
-                  </a:txBody>
-                  <a:tcPr>
-                    <a:solidFill>
-                      <a:srgbClr val="EDF3F7"/>
-                    </a:solidFill>
-                  </a:tcPr>
-                </a:tc>
-                <a:tc>
-                  <a:txBody>
-                    <a:bodyPr/>
-                    <a:lstStyle/>
-                    <a:p>
-                      <a:pPr algn="l"/>
-                      <a:r>
-                        <a:rPr sz="800">
-                          <a:solidFill>
-                            <a:srgbClr val="15324A"/>
-                          </a:solidFill>
-                          <a:latin typeface="Calibri"/>
-                        </a:rPr>
-                        <a:t>Challenge</a:t>
-                      </a:r>
-                    </a:p>
-                  </a:txBody>
-                  <a:tcPr>
-                    <a:solidFill>
-                      <a:srgbClr val="EDF3F7"/>
-                    </a:solidFill>
-                  </a:tcPr>
-                </a:tc>
-                <a:tc>
-                  <a:txBody>
-                    <a:bodyPr/>
-                    <a:lstStyle/>
-                    <a:p>
-                      <a:pPr algn="l"/>
-                      <a:r>
-                        <a:rPr sz="800">
-                          <a:solidFill>
-                            <a:srgbClr val="15324A"/>
-                          </a:solidFill>
-                          <a:latin typeface="Calibri"/>
-                        </a:rPr>
-                        <a:t>Tighten the primary purpose framing so the design and endpoint package read as c</a:t>
-                      </a:r>
-                    </a:p>
-                  </a:txBody>
-                  <a:tcPr>
-                    <a:solidFill>
-                      <a:srgbClr val="EDF3F7"/>
-                    </a:solidFill>
-                  </a:tcPr>
-                </a:tc>
-                <a:tc>
-                  <a:txBody>
-                    <a:bodyPr/>
-                    <a:lstStyle/>
-                    <a:p>
-                      <a:pPr algn="l"/>
-                      <a:r>
-                        <a:rPr sz="800">
-                          <a:solidFill>
-                            <a:srgbClr val="15324A"/>
-                          </a:solidFill>
-                          <a:latin typeface="Calibri"/>
-                        </a:rPr>
-                        <a:t>Completed match 50.0% versus disrupted match 100.0%.</a:t>
-                      </a:r>
-                    </a:p>
-                  </a:txBody>
-                  <a:tcPr>
-                    <a:solidFill>
-                      <a:srgbClr val="EDF3F7"/>
-                    </a:solidFill>
-                  </a:tcPr>
-                </a:tc>
-              </a:tr>
-              <a:tr h="809897">
-                <a:tc>
-                  <a:txBody>
-                    <a:bodyPr/>
-                    <a:lstStyle/>
-                    <a:p>
-                      <a:pPr algn="l"/>
-                      <a:r>
-                        <a:rPr sz="800">
-                          <a:solidFill>
-                            <a:srgbClr val="15324A"/>
-                          </a:solidFill>
-                          <a:latin typeface="Calibri"/>
-                        </a:rPr>
-                        <a:t>Medium</a:t>
-                      </a:r>
-                    </a:p>
-                  </a:txBody>
-                  <a:tcPr>
-                    <a:solidFill>
-                      <a:srgbClr val="FFFFFF"/>
-                    </a:solidFill>
-                  </a:tcPr>
-                </a:tc>
-                <a:tc>
-                  <a:txBody>
-                    <a:bodyPr/>
-                    <a:lstStyle/>
-                    <a:p>
-                      <a:pPr algn="l"/>
-                      <a:r>
-                        <a:rPr sz="800">
-                          <a:solidFill>
-                            <a:srgbClr val="15324A"/>
-                          </a:solidFill>
-                          <a:latin typeface="Calibri"/>
-                        </a:rPr>
-                        <a:t>Study Type</a:t>
-                      </a:r>
-                    </a:p>
-                  </a:txBody>
-                  <a:tcPr>
-                    <a:solidFill>
-                      <a:srgbClr val="FFFFFF"/>
-                    </a:solidFill>
-                  </a:tcPr>
-                </a:tc>
-                <a:tc>
-                  <a:txBody>
-                    <a:bodyPr/>
-                    <a:lstStyle/>
-                    <a:p>
-                      <a:pPr algn="l"/>
-                      <a:r>
-                        <a:rPr sz="800">
-                          <a:solidFill>
-                            <a:srgbClr val="15324A"/>
-                          </a:solidFill>
-                          <a:latin typeface="Calibri"/>
-                        </a:rPr>
-                        <a:t>Challenge</a:t>
-                      </a:r>
-                    </a:p>
-                  </a:txBody>
-                  <a:tcPr>
-                    <a:solidFill>
-                      <a:srgbClr val="FFFFFF"/>
-                    </a:solidFill>
-                  </a:tcPr>
-                </a:tc>
-                <a:tc>
-                  <a:txBody>
-                    <a:bodyPr/>
-                    <a:lstStyle/>
-                    <a:p>
-                      <a:pPr algn="l"/>
-                      <a:r>
-                        <a:rPr sz="800">
-                          <a:solidFill>
-                            <a:srgbClr val="15324A"/>
-                          </a:solidFill>
-                          <a:latin typeface="Calibri"/>
-                        </a:rPr>
-                        <a:t>Pressure-test whether the study type is the strongest route for the program deci</a:t>
-                      </a:r>
-                    </a:p>
-                  </a:txBody>
-                  <a:tcPr>
-                    <a:solidFill>
-                      <a:srgbClr val="FFFFFF"/>
-                    </a:solidFill>
-                  </a:tcPr>
-                </a:tc>
-                <a:tc>
-                  <a:txBody>
-                    <a:bodyPr/>
-                    <a:lstStyle/>
-                    <a:p>
-                      <a:pPr algn="l"/>
-                      <a:r>
-                        <a:rPr sz="800">
-                          <a:solidFill>
-                            <a:srgbClr val="15324A"/>
-                          </a:solidFill>
-                          <a:latin typeface="Calibri"/>
-                        </a:rPr>
-                        <a:t>Completed match 60.0% versus disrupted match 100.0%.</a:t>
-                      </a:r>
-                    </a:p>
-                  </a:txBody>
-                  <a:tcPr>
-                    <a:solidFill>
-                      <a:srgbClr val="FFFFFF"/>
-                    </a:solidFill>
-                  </a:tcPr>
-                </a:tc>
-              </a:tr>
-              <a:tr h="809898">
-                <a:tc>
-                  <a:txBody>
-                    <a:bodyPr/>
-                    <a:lstStyle/>
-                    <a:p>
-                      <a:pPr algn="l"/>
-                      <a:r>
-                        <a:rPr sz="800">
-                          <a:solidFill>
-                            <a:srgbClr val="15324A"/>
-                          </a:solidFill>
-                          <a:latin typeface="Calibri"/>
-                        </a:rPr>
-                        <a:t>Monitor</a:t>
-                      </a:r>
-                    </a:p>
-                  </a:txBody>
-                  <a:tcPr>
-                    <a:solidFill>
-                      <a:srgbClr val="EDF3F7"/>
-                    </a:solidFill>
-                  </a:tcPr>
-                </a:tc>
-                <a:tc>
-                  <a:txBody>
-                    <a:bodyPr/>
-                    <a:lstStyle/>
-                    <a:p>
-                      <a:pPr algn="l"/>
-                      <a:r>
-                        <a:rPr sz="800">
-                          <a:solidFill>
-                            <a:srgbClr val="15324A"/>
-                          </a:solidFill>
-                          <a:latin typeface="Calibri"/>
-                        </a:rPr>
-                        <a:t>Evidence strength</a:t>
-                      </a:r>
-                    </a:p>
-                  </a:txBody>
-                  <a:tcPr>
-                    <a:solidFill>
-                      <a:srgbClr val="EDF3F7"/>
-                    </a:solidFill>
-                  </a:tcPr>
-                </a:tc>
-                <a:tc>
-                  <a:txBody>
-                    <a:bodyPr/>
-                    <a:lstStyle/>
-                    <a:p>
-                      <a:pPr algn="l"/>
-                      <a:r>
-                        <a:rPr sz="800">
-                          <a:solidFill>
-                            <a:srgbClr val="15324A"/>
-                          </a:solidFill>
-                          <a:latin typeface="Calibri"/>
-                        </a:rPr>
-                        <a:t>Monitor</a:t>
-                      </a:r>
-                    </a:p>
-                  </a:txBody>
-                  <a:tcPr>
-                    <a:solidFill>
-                      <a:srgbClr val="EDF3F7"/>
-                    </a:solidFill>
-                  </a:tcPr>
-                </a:tc>
-                <a:tc>
-                  <a:txBody>
-                    <a:bodyPr/>
-                    <a:lstStyle/>
-                    <a:p>
-                      <a:pPr algn="l"/>
-                      <a:r>
-                        <a:rPr sz="800">
-                          <a:solidFill>
-                            <a:srgbClr val="15324A"/>
-                          </a:solidFill>
-                          <a:latin typeface="Calibri"/>
-                        </a:rPr>
-                        <a:t>Treat the benchmark output as directional until the comparator evidence base is </a:t>
-                      </a:r>
-                    </a:p>
-                  </a:txBody>
-                  <a:tcPr>
-                    <a:solidFill>
-                      <a:srgbClr val="EDF3F7"/>
-                    </a:solidFill>
-                  </a:tcPr>
-                </a:tc>
-                <a:tc>
-                  <a:txBody>
-                    <a:bodyPr/>
-                    <a:lstStyle/>
-                    <a:p>
-                      <a:pPr algn="l"/>
-                      <a:r>
-                        <a:rPr sz="800">
-                          <a:solidFill>
-                            <a:srgbClr val="15324A"/>
-                          </a:solidFill>
-                          <a:latin typeface="Calibri"/>
-                        </a:rPr>
-                        <a:t>Total matched studies 19; completed 10; disrupted 2.</a:t>
-                      </a:r>
-                    </a:p>
-                  </a:txBody>
-                  <a:tcPr>
-                    <a:solidFill>
-                      <a:srgbClr val="EDF3F7"/>
                     </a:solidFill>
                   </a:tcPr>
                 </a:tc>
@@ -11277,6 +12465,76 @@
           </a:graphicData>
         </a:graphic>
       </p:graphicFrame>
+      <p:sp>
+        <p:nvSpPr>
+          <p:cNvPr id="6" name="TextBox 5"/>
+          <p:cNvSpPr txBox="1"/>
+          <p:nvPr/>
+        </p:nvSpPr>
+        <p:spPr>
+          <a:xfrm>
+            <a:off x="182880" y="6583680"/>
+            <a:ext cx="8229600" cy="228600"/>
+          </a:xfrm>
+          <a:prstGeom prst="rect">
+            <a:avLst/>
+          </a:prstGeom>
+          <a:noFill/>
+        </p:spPr>
+        <p:txBody>
+          <a:bodyPr wrap="square">
+            <a:spAutoFit/>
+          </a:bodyPr>
+          <a:lstStyle/>
+          <a:p>
+            <a:pPr algn="l"/>
+            <a:r>
+              <a:rPr sz="700" b="0">
+                <a:solidFill>
+                  <a:srgbClr val="5F6B7A"/>
+                </a:solidFill>
+                <a:latin typeface="Calibri"/>
+              </a:rPr>
+              <a:t>Trial Design Explorer | Clinical Trial Planning Intelligence | Confidential draft</a:t>
+            </a:r>
+          </a:p>
+        </p:txBody>
+      </p:sp>
+      <p:sp>
+        <p:nvSpPr>
+          <p:cNvPr id="7" name="TextBox 6"/>
+          <p:cNvSpPr txBox="1"/>
+          <p:nvPr/>
+        </p:nvSpPr>
+        <p:spPr>
+          <a:xfrm>
+            <a:off x="11247120" y="6583680"/>
+            <a:ext cx="914400" cy="228600"/>
+          </a:xfrm>
+          <a:prstGeom prst="rect">
+            <a:avLst/>
+          </a:prstGeom>
+          <a:noFill/>
+        </p:spPr>
+        <p:txBody>
+          <a:bodyPr wrap="square">
+            <a:spAutoFit/>
+          </a:bodyPr>
+          <a:lstStyle/>
+          <a:p>
+            <a:pPr algn="r"/>
+            <a:r>
+              <a:rPr sz="700" b="0">
+                <a:solidFill>
+                  <a:srgbClr val="5F6B7A"/>
+                </a:solidFill>
+                <a:latin typeface="Calibri"/>
+              </a:rPr>
+              <a:t>8 / 12</a:t>
+            </a:r>
+          </a:p>
+        </p:txBody>
+      </p:sp>
     </p:spTree>
   </p:cSld>
   <p:clrMapOvr>
@@ -11408,9 +12666,57 @@
           </a:p>
         </p:txBody>
       </p:sp>
-      <p:sp>
-        <p:nvSpPr>
-          <p:cNvPr id="5" name="TextBox 4"/>
+      <p:pic>
+        <p:nvPicPr>
+          <p:cNvPr id="5" name="Picture 4" descr="image.png"/>
+          <p:cNvPicPr>
+            <a:picLocks noChangeAspect="1"/>
+          </p:cNvPicPr>
+          <p:nvPr/>
+        </p:nvPicPr>
+        <p:blipFill>
+          <a:blip r:embed="rId2"/>
+          <a:stretch>
+            <a:fillRect/>
+          </a:stretch>
+        </p:blipFill>
+        <p:spPr>
+          <a:xfrm>
+            <a:off x="182880" y="914400"/>
+            <a:ext cx="6858000" cy="4572000"/>
+          </a:xfrm>
+          <a:prstGeom prst="rect">
+            <a:avLst/>
+          </a:prstGeom>
+        </p:spPr>
+      </p:pic>
+      <p:pic>
+        <p:nvPicPr>
+          <p:cNvPr id="6" name="Picture 5" descr="image.png"/>
+          <p:cNvPicPr>
+            <a:picLocks noChangeAspect="1"/>
+          </p:cNvPicPr>
+          <p:nvPr/>
+        </p:nvPicPr>
+        <p:blipFill>
+          <a:blip r:embed="rId3"/>
+          <a:stretch>
+            <a:fillRect/>
+          </a:stretch>
+        </p:blipFill>
+        <p:spPr>
+          <a:xfrm>
+            <a:off x="7498079" y="914400"/>
+            <a:ext cx="4389120" cy="3657600"/>
+          </a:xfrm>
+          <a:prstGeom prst="rect">
+            <a:avLst/>
+          </a:prstGeom>
+        </p:spPr>
+      </p:pic>
+      <p:sp>
+        <p:nvSpPr>
+          <p:cNvPr id="7" name="TextBox 6"/>
           <p:cNvSpPr txBox="1"/>
           <p:nvPr/>
         </p:nvSpPr>
@@ -11445,7 +12751,7 @@
       </p:sp>
       <p:sp>
         <p:nvSpPr>
-          <p:cNvPr id="6" name="TextBox 5"/>
+          <p:cNvPr id="8" name="TextBox 7"/>
           <p:cNvSpPr txBox="1"/>
           <p:nvPr/>
         </p:nvSpPr>
@@ -11473,59 +12779,11 @@
                 </a:solidFill>
                 <a:latin typeface="Calibri"/>
               </a:rPr>
-              <a:t>9 / 11</a:t>
-            </a:r>
-          </a:p>
-        </p:txBody>
-      </p:sp>
-      <p:pic>
-        <p:nvPicPr>
-          <p:cNvPr id="7" name="Picture 6" descr="image.png"/>
-          <p:cNvPicPr>
-            <a:picLocks noChangeAspect="1"/>
-          </p:cNvPicPr>
-          <p:nvPr/>
-        </p:nvPicPr>
-        <p:blipFill>
-          <a:blip r:embed="rId2"/>
-          <a:stretch>
-            <a:fillRect/>
-          </a:stretch>
-        </p:blipFill>
-        <p:spPr>
-          <a:xfrm>
-            <a:off x="182880" y="914400"/>
-            <a:ext cx="6858000" cy="4572000"/>
-          </a:xfrm>
-          <a:prstGeom prst="rect">
-            <a:avLst/>
-          </a:prstGeom>
-        </p:spPr>
-      </p:pic>
-      <p:pic>
-        <p:nvPicPr>
-          <p:cNvPr id="8" name="Picture 7" descr="image.png"/>
-          <p:cNvPicPr>
-            <a:picLocks noChangeAspect="1"/>
-          </p:cNvPicPr>
-          <p:nvPr/>
-        </p:nvPicPr>
-        <p:blipFill>
-          <a:blip r:embed="rId3"/>
-          <a:stretch>
-            <a:fillRect/>
-          </a:stretch>
-        </p:blipFill>
-        <p:spPr>
-          <a:xfrm>
-            <a:off x="7498079" y="914400"/>
-            <a:ext cx="4389120" cy="3657600"/>
-          </a:xfrm>
-          <a:prstGeom prst="rect">
-            <a:avLst/>
-          </a:prstGeom>
-        </p:spPr>
-      </p:pic>
+              <a:t>9 / 12</a:t>
+            </a:r>
+          </a:p>
+        </p:txBody>
+      </p:sp>
     </p:spTree>
   </p:cSld>
   <p:clrMapOvr>
